--- a/output/drafts/Rentify_v6_slide17_financial-detail.pptx
+++ b/output/drafts/Rentify_v6_slide17_financial-detail.pptx
@@ -502,7 +502,7 @@
           <a:p>
             <a:r>
               <a:rPr lang="en-US" dirty="0"/>
-              <a:t>Figures from the team 36-month model (lean cost base) as shown in the v2 deck; only the assumption labels were updated for the Free / Starter / Pro pricing.</a:t>
+              <a:t>Figures from docs/rentify-financial-model.xlsx (build/financial_model.py). Paying-shop numbers are unchanged from the team 36-month model; costs are rebuilt bottom-up. All inputs are assumptions to validate in the pilot.</a:t>
             </a:r>
             <a:endParaRPr lang="en-US" dirty="0"/>
           </a:p>
@@ -908,7 +908,7 @@
                 <a:ea typeface="Arial" pitchFamily="34" charset="-122"/>
                 <a:cs typeface="Arial" pitchFamily="34" charset="-120"/>
               </a:rPr>
-              <a:t>Financial detail (team model, lean scenario)</a:t>
+              <a:t>Financial detail (bottom-up model)</a:t>
             </a:r>
             <a:endParaRPr lang="en-US" sz="3000" dirty="0"/>
           </a:p>
@@ -943,7 +943,7 @@
                 <a:gridCol w="1188720"/>
                 <a:gridCol w="5148072"/>
               </a:tblGrid>
-              <a:tr h="475488">
+              <a:tr h="457200">
                 <a:tc>
                   <a:txBody>
                     <a:bodyPr/>
@@ -1285,7 +1285,7 @@
                   </a:tcPr>
                 </a:tc>
               </a:tr>
-              <a:tr h="475488">
+              <a:tr h="457200">
                 <a:tc>
                   <a:txBody>
                     <a:bodyPr/>
@@ -1563,7 +1563,7 @@
                           <a:ea typeface="Arial" pitchFamily="34" charset="-122"/>
                           <a:cs typeface="Arial" pitchFamily="34" charset="-120"/>
                         </a:rPr>
-                        <a:t>Starter $5 / Pro $10; $5 average per paying shop; Free plan pays none</a:t>
+                        <a:t>Paying shops 58 → 419 → 1,129 (team model) × $5 average plan</a:t>
                       </a:r>
                       <a:endParaRPr lang="en-US" sz="1300" dirty="0">
                         <a:latin typeface="Arial" charset="0"/>
@@ -1612,7 +1612,7 @@
                   </a:tcPr>
                 </a:tc>
               </a:tr>
-              <a:tr h="475488">
+              <a:tr h="457200">
                 <a:tc>
                   <a:txBody>
                     <a:bodyPr/>
@@ -1630,7 +1630,7 @@
                           <a:ea typeface="Arial" pitchFamily="34" charset="-122"/>
                           <a:cs typeface="Arial" pitchFamily="34" charset="-120"/>
                         </a:rPr>
-                        <a:t>Commission revenue</a:t>
+                        <a:t>Cost of service</a:t>
                       </a:r>
                       <a:endParaRPr lang="en-US" sz="1300" dirty="0">
                         <a:latin typeface="Arial" charset="0"/>
@@ -1695,7 +1695,7 @@
                           <a:ea typeface="Arial" pitchFamily="34" charset="-122"/>
                           <a:cs typeface="Arial" pitchFamily="34" charset="-120"/>
                         </a:rPr>
-                        <a:t>0</a:t>
+                        <a:t>603</a:t>
                       </a:r>
                       <a:endParaRPr lang="en-US" sz="1300" dirty="0">
                         <a:latin typeface="Arial" charset="0"/>
@@ -1760,7 +1760,7 @@
                           <a:ea typeface="Arial" pitchFamily="34" charset="-122"/>
                           <a:cs typeface="Arial" pitchFamily="34" charset="-120"/>
                         </a:rPr>
-                        <a:t>0</a:t>
+                        <a:t>1,376</a:t>
                       </a:r>
                       <a:endParaRPr lang="en-US" sz="1300" dirty="0">
                         <a:latin typeface="Arial" charset="0"/>
@@ -1825,7 +1825,7 @@
                           <a:ea typeface="Arial" pitchFamily="34" charset="-122"/>
                           <a:cs typeface="Arial" pitchFamily="34" charset="-120"/>
                         </a:rPr>
-                        <a:t>0</a:t>
+                        <a:t>2,643</a:t>
                       </a:r>
                       <a:endParaRPr lang="en-US" sz="1300" dirty="0">
                         <a:latin typeface="Arial" charset="0"/>
@@ -1890,7 +1890,7 @@
                           <a:ea typeface="Arial" pitchFamily="34" charset="-122"/>
                           <a:cs typeface="Arial" pitchFamily="34" charset="-120"/>
                         </a:rPr>
-                        <a:t>Not modelled; starts with online marketplace payments (2027)</a:t>
+                        <a:t>Servers, database, photo storage, email: $50 → $225 / month</a:t>
                       </a:r>
                       <a:endParaRPr lang="en-US" sz="1300" dirty="0">
                         <a:latin typeface="Arial" charset="0"/>
@@ -1939,334 +1939,7 @@
                   </a:tcPr>
                 </a:tc>
               </a:tr>
-              <a:tr h="475488">
-                <a:tc>
-                  <a:txBody>
-                    <a:bodyPr/>
-                    <a:lstStyle/>
-                    <a:p>
-                      <a:pPr indent="0" marL="0">
-                        <a:buNone/>
-                      </a:pPr>
-                      <a:r>
-                        <a:rPr lang="en-US" sz="1300" dirty="0">
-                          <a:solidFill>
-                            <a:srgbClr val="15243A"/>
-                          </a:solidFill>
-                          <a:latin typeface="Arial" pitchFamily="34" charset="0"/>
-                          <a:ea typeface="Arial" pitchFamily="34" charset="-122"/>
-                          <a:cs typeface="Arial" pitchFamily="34" charset="-120"/>
-                        </a:rPr>
-                        <a:t>Cost of service</a:t>
-                      </a:r>
-                      <a:endParaRPr lang="en-US" sz="1300" dirty="0">
-                        <a:latin typeface="Arial" charset="0"/>
-                        <a:ea typeface="Arial" charset="0"/>
-                        <a:cs typeface="Arial" charset="0"/>
-                      </a:endParaRPr>
-                    </a:p>
-                  </a:txBody>
-                  <a:tcPr marL="73152" marR="73152" marT="73152" marB="73152" anchor="ctr">
-                    <a:lnL w="9525" cap="flat" cmpd="sng" algn="ctr">
-                      <a:solidFill>
-                        <a:srgbClr val="D7E1ED"/>
-                      </a:solidFill>
-                      <a:prstDash val="solid"/>
-                      <a:round/>
-                      <a:headEnd type="none" w="med" len="med"/>
-                      <a:tailEnd type="none" w="med" len="med"/>
-                    </a:lnL>
-                    <a:lnR w="9525" cap="flat" cmpd="sng" algn="ctr">
-                      <a:solidFill>
-                        <a:srgbClr val="D7E1ED"/>
-                      </a:solidFill>
-                      <a:prstDash val="solid"/>
-                      <a:round/>
-                      <a:headEnd type="none" w="med" len="med"/>
-                      <a:tailEnd type="none" w="med" len="med"/>
-                    </a:lnR>
-                    <a:lnT w="9525" cap="flat" cmpd="sng" algn="ctr">
-                      <a:solidFill>
-                        <a:srgbClr val="D7E1ED"/>
-                      </a:solidFill>
-                      <a:prstDash val="solid"/>
-                      <a:round/>
-                      <a:headEnd type="none" w="med" len="med"/>
-                      <a:tailEnd type="none" w="med" len="med"/>
-                    </a:lnT>
-                    <a:lnB w="9525" cap="flat" cmpd="sng" algn="ctr">
-                      <a:solidFill>
-                        <a:srgbClr val="D7E1ED"/>
-                      </a:solidFill>
-                      <a:prstDash val="solid"/>
-                      <a:round/>
-                      <a:headEnd type="none" w="med" len="med"/>
-                      <a:tailEnd type="none" w="med" len="med"/>
-                    </a:lnB>
-                  </a:tcPr>
-                </a:tc>
-                <a:tc>
-                  <a:txBody>
-                    <a:bodyPr/>
-                    <a:lstStyle/>
-                    <a:p>
-                      <a:pPr algn="r" indent="0" marL="0">
-                        <a:buNone/>
-                      </a:pPr>
-                      <a:r>
-                        <a:rPr lang="en-US" sz="1300" dirty="0">
-                          <a:solidFill>
-                            <a:srgbClr val="15243A"/>
-                          </a:solidFill>
-                          <a:latin typeface="Arial" pitchFamily="34" charset="0"/>
-                          <a:ea typeface="Arial" pitchFamily="34" charset="-122"/>
-                          <a:cs typeface="Arial" pitchFamily="34" charset="-120"/>
-                        </a:rPr>
-                        <a:t>1,543</a:t>
-                      </a:r>
-                      <a:endParaRPr lang="en-US" sz="1300" dirty="0">
-                        <a:latin typeface="Arial" charset="0"/>
-                        <a:ea typeface="Arial" charset="0"/>
-                        <a:cs typeface="Arial" charset="0"/>
-                      </a:endParaRPr>
-                    </a:p>
-                  </a:txBody>
-                  <a:tcPr marL="73152" marR="73152" marT="73152" marB="73152" anchor="ctr">
-                    <a:lnL w="9525" cap="flat" cmpd="sng" algn="ctr">
-                      <a:solidFill>
-                        <a:srgbClr val="D7E1ED"/>
-                      </a:solidFill>
-                      <a:prstDash val="solid"/>
-                      <a:round/>
-                      <a:headEnd type="none" w="med" len="med"/>
-                      <a:tailEnd type="none" w="med" len="med"/>
-                    </a:lnL>
-                    <a:lnR w="9525" cap="flat" cmpd="sng" algn="ctr">
-                      <a:solidFill>
-                        <a:srgbClr val="D7E1ED"/>
-                      </a:solidFill>
-                      <a:prstDash val="solid"/>
-                      <a:round/>
-                      <a:headEnd type="none" w="med" len="med"/>
-                      <a:tailEnd type="none" w="med" len="med"/>
-                    </a:lnR>
-                    <a:lnT w="9525" cap="flat" cmpd="sng" algn="ctr">
-                      <a:solidFill>
-                        <a:srgbClr val="D7E1ED"/>
-                      </a:solidFill>
-                      <a:prstDash val="solid"/>
-                      <a:round/>
-                      <a:headEnd type="none" w="med" len="med"/>
-                      <a:tailEnd type="none" w="med" len="med"/>
-                    </a:lnT>
-                    <a:lnB w="9525" cap="flat" cmpd="sng" algn="ctr">
-                      <a:solidFill>
-                        <a:srgbClr val="D7E1ED"/>
-                      </a:solidFill>
-                      <a:prstDash val="solid"/>
-                      <a:round/>
-                      <a:headEnd type="none" w="med" len="med"/>
-                      <a:tailEnd type="none" w="med" len="med"/>
-                    </a:lnB>
-                  </a:tcPr>
-                </a:tc>
-                <a:tc>
-                  <a:txBody>
-                    <a:bodyPr/>
-                    <a:lstStyle/>
-                    <a:p>
-                      <a:pPr algn="r" indent="0" marL="0">
-                        <a:buNone/>
-                      </a:pPr>
-                      <a:r>
-                        <a:rPr lang="en-US" sz="1300" dirty="0">
-                          <a:solidFill>
-                            <a:srgbClr val="15243A"/>
-                          </a:solidFill>
-                          <a:latin typeface="Arial" pitchFamily="34" charset="0"/>
-                          <a:ea typeface="Arial" pitchFamily="34" charset="-122"/>
-                          <a:cs typeface="Arial" pitchFamily="34" charset="-120"/>
-                        </a:rPr>
-                        <a:t>8,939</a:t>
-                      </a:r>
-                      <a:endParaRPr lang="en-US" sz="1300" dirty="0">
-                        <a:latin typeface="Arial" charset="0"/>
-                        <a:ea typeface="Arial" charset="0"/>
-                        <a:cs typeface="Arial" charset="0"/>
-                      </a:endParaRPr>
-                    </a:p>
-                  </a:txBody>
-                  <a:tcPr marL="73152" marR="73152" marT="73152" marB="73152" anchor="ctr">
-                    <a:lnL w="9525" cap="flat" cmpd="sng" algn="ctr">
-                      <a:solidFill>
-                        <a:srgbClr val="D7E1ED"/>
-                      </a:solidFill>
-                      <a:prstDash val="solid"/>
-                      <a:round/>
-                      <a:headEnd type="none" w="med" len="med"/>
-                      <a:tailEnd type="none" w="med" len="med"/>
-                    </a:lnL>
-                    <a:lnR w="9525" cap="flat" cmpd="sng" algn="ctr">
-                      <a:solidFill>
-                        <a:srgbClr val="D7E1ED"/>
-                      </a:solidFill>
-                      <a:prstDash val="solid"/>
-                      <a:round/>
-                      <a:headEnd type="none" w="med" len="med"/>
-                      <a:tailEnd type="none" w="med" len="med"/>
-                    </a:lnR>
-                    <a:lnT w="9525" cap="flat" cmpd="sng" algn="ctr">
-                      <a:solidFill>
-                        <a:srgbClr val="D7E1ED"/>
-                      </a:solidFill>
-                      <a:prstDash val="solid"/>
-                      <a:round/>
-                      <a:headEnd type="none" w="med" len="med"/>
-                      <a:tailEnd type="none" w="med" len="med"/>
-                    </a:lnT>
-                    <a:lnB w="9525" cap="flat" cmpd="sng" algn="ctr">
-                      <a:solidFill>
-                        <a:srgbClr val="D7E1ED"/>
-                      </a:solidFill>
-                      <a:prstDash val="solid"/>
-                      <a:round/>
-                      <a:headEnd type="none" w="med" len="med"/>
-                      <a:tailEnd type="none" w="med" len="med"/>
-                    </a:lnB>
-                  </a:tcPr>
-                </a:tc>
-                <a:tc>
-                  <a:txBody>
-                    <a:bodyPr/>
-                    <a:lstStyle/>
-                    <a:p>
-                      <a:pPr algn="r" indent="0" marL="0">
-                        <a:buNone/>
-                      </a:pPr>
-                      <a:r>
-                        <a:rPr lang="en-US" sz="1300" dirty="0">
-                          <a:solidFill>
-                            <a:srgbClr val="15243A"/>
-                          </a:solidFill>
-                          <a:latin typeface="Arial" pitchFamily="34" charset="0"/>
-                          <a:ea typeface="Arial" pitchFamily="34" charset="-122"/>
-                          <a:cs typeface="Arial" pitchFamily="34" charset="-120"/>
-                        </a:rPr>
-                        <a:t>21,669</a:t>
-                      </a:r>
-                      <a:endParaRPr lang="en-US" sz="1300" dirty="0">
-                        <a:latin typeface="Arial" charset="0"/>
-                        <a:ea typeface="Arial" charset="0"/>
-                        <a:cs typeface="Arial" charset="0"/>
-                      </a:endParaRPr>
-                    </a:p>
-                  </a:txBody>
-                  <a:tcPr marL="73152" marR="73152" marT="73152" marB="73152" anchor="ctr">
-                    <a:lnL w="9525" cap="flat" cmpd="sng" algn="ctr">
-                      <a:solidFill>
-                        <a:srgbClr val="D7E1ED"/>
-                      </a:solidFill>
-                      <a:prstDash val="solid"/>
-                      <a:round/>
-                      <a:headEnd type="none" w="med" len="med"/>
-                      <a:tailEnd type="none" w="med" len="med"/>
-                    </a:lnL>
-                    <a:lnR w="9525" cap="flat" cmpd="sng" algn="ctr">
-                      <a:solidFill>
-                        <a:srgbClr val="D7E1ED"/>
-                      </a:solidFill>
-                      <a:prstDash val="solid"/>
-                      <a:round/>
-                      <a:headEnd type="none" w="med" len="med"/>
-                      <a:tailEnd type="none" w="med" len="med"/>
-                    </a:lnR>
-                    <a:lnT w="9525" cap="flat" cmpd="sng" algn="ctr">
-                      <a:solidFill>
-                        <a:srgbClr val="D7E1ED"/>
-                      </a:solidFill>
-                      <a:prstDash val="solid"/>
-                      <a:round/>
-                      <a:headEnd type="none" w="med" len="med"/>
-                      <a:tailEnd type="none" w="med" len="med"/>
-                    </a:lnT>
-                    <a:lnB w="9525" cap="flat" cmpd="sng" algn="ctr">
-                      <a:solidFill>
-                        <a:srgbClr val="D7E1ED"/>
-                      </a:solidFill>
-                      <a:prstDash val="solid"/>
-                      <a:round/>
-                      <a:headEnd type="none" w="med" len="med"/>
-                      <a:tailEnd type="none" w="med" len="med"/>
-                    </a:lnB>
-                  </a:tcPr>
-                </a:tc>
-                <a:tc>
-                  <a:txBody>
-                    <a:bodyPr/>
-                    <a:lstStyle/>
-                    <a:p>
-                      <a:pPr indent="0" marL="0">
-                        <a:buNone/>
-                      </a:pPr>
-                      <a:r>
-                        <a:rPr lang="en-US" sz="1300" dirty="0">
-                          <a:solidFill>
-                            <a:srgbClr val="15243A"/>
-                          </a:solidFill>
-                          <a:latin typeface="Arial" pitchFamily="34" charset="0"/>
-                          <a:ea typeface="Arial" pitchFamily="34" charset="-122"/>
-                          <a:cs typeface="Arial" pitchFamily="34" charset="-120"/>
-                        </a:rPr>
-                        <a:t>$0.30 per active + $0.75 per paying shop / month</a:t>
-                      </a:r>
-                      <a:endParaRPr lang="en-US" sz="1300" dirty="0">
-                        <a:latin typeface="Arial" charset="0"/>
-                        <a:ea typeface="Arial" charset="0"/>
-                        <a:cs typeface="Arial" charset="0"/>
-                      </a:endParaRPr>
-                    </a:p>
-                  </a:txBody>
-                  <a:tcPr marL="73152" marR="73152" marT="73152" marB="73152" anchor="ctr">
-                    <a:lnL w="9525" cap="flat" cmpd="sng" algn="ctr">
-                      <a:solidFill>
-                        <a:srgbClr val="D7E1ED"/>
-                      </a:solidFill>
-                      <a:prstDash val="solid"/>
-                      <a:round/>
-                      <a:headEnd type="none" w="med" len="med"/>
-                      <a:tailEnd type="none" w="med" len="med"/>
-                    </a:lnL>
-                    <a:lnR w="9525" cap="flat" cmpd="sng" algn="ctr">
-                      <a:solidFill>
-                        <a:srgbClr val="D7E1ED"/>
-                      </a:solidFill>
-                      <a:prstDash val="solid"/>
-                      <a:round/>
-                      <a:headEnd type="none" w="med" len="med"/>
-                      <a:tailEnd type="none" w="med" len="med"/>
-                    </a:lnR>
-                    <a:lnT w="9525" cap="flat" cmpd="sng" algn="ctr">
-                      <a:solidFill>
-                        <a:srgbClr val="D7E1ED"/>
-                      </a:solidFill>
-                      <a:prstDash val="solid"/>
-                      <a:round/>
-                      <a:headEnd type="none" w="med" len="med"/>
-                      <a:tailEnd type="none" w="med" len="med"/>
-                    </a:lnT>
-                    <a:lnB w="9525" cap="flat" cmpd="sng" algn="ctr">
-                      <a:solidFill>
-                        <a:srgbClr val="D7E1ED"/>
-                      </a:solidFill>
-                      <a:prstDash val="solid"/>
-                      <a:round/>
-                      <a:headEnd type="none" w="med" len="med"/>
-                      <a:tailEnd type="none" w="med" len="med"/>
-                    </a:lnB>
-                  </a:tcPr>
-                </a:tc>
-              </a:tr>
-              <a:tr h="475488">
+              <a:tr h="457200">
                 <a:tc>
                   <a:txBody>
                     <a:bodyPr/>
@@ -2352,7 +2025,7 @@
                           <a:ea typeface="Arial" pitchFamily="34" charset="-122"/>
                           <a:cs typeface="Arial" pitchFamily="34" charset="-120"/>
                         </a:rPr>
-                        <a:t>1,913</a:t>
+                        <a:t>2,853</a:t>
                       </a:r>
                       <a:endParaRPr lang="en-US" sz="1300" dirty="0">
                         <a:latin typeface="Arial" charset="0"/>
@@ -2420,7 +2093,7 @@
                           <a:ea typeface="Arial" pitchFamily="34" charset="-122"/>
                           <a:cs typeface="Arial" pitchFamily="34" charset="-120"/>
                         </a:rPr>
-                        <a:t>16,193</a:t>
+                        <a:t>23,755</a:t>
                       </a:r>
                       <a:endParaRPr lang="en-US" sz="1300" dirty="0">
                         <a:latin typeface="Arial" charset="0"/>
@@ -2488,7 +2161,7 @@
                           <a:ea typeface="Arial" pitchFamily="34" charset="-122"/>
                           <a:cs typeface="Arial" pitchFamily="34" charset="-120"/>
                         </a:rPr>
-                        <a:t>46,074</a:t>
+                        <a:t>65,101</a:t>
                       </a:r>
                       <a:endParaRPr lang="en-US" sz="1300" dirty="0">
                         <a:latin typeface="Arial" charset="0"/>
@@ -2597,7 +2270,7 @@
                   </a:tcPr>
                 </a:tc>
               </a:tr>
-              <a:tr h="475488">
+              <a:tr h="457200">
                 <a:tc>
                   <a:txBody>
                     <a:bodyPr/>
@@ -2680,7 +2353,7 @@
                           <a:ea typeface="Arial" pitchFamily="34" charset="-122"/>
                           <a:cs typeface="Arial" pitchFamily="34" charset="-120"/>
                         </a:rPr>
-                        <a:t>20,250</a:t>
+                        <a:t>3,600</a:t>
                       </a:r>
                       <a:endParaRPr lang="en-US" sz="1300" dirty="0">
                         <a:latin typeface="Arial" charset="0"/>
@@ -2745,7 +2418,7 @@
                           <a:ea typeface="Arial" pitchFamily="34" charset="-122"/>
                           <a:cs typeface="Arial" pitchFamily="34" charset="-120"/>
                         </a:rPr>
-                        <a:t>35,300</a:t>
+                        <a:t>10,800</a:t>
                       </a:r>
                       <a:endParaRPr lang="en-US" sz="1300" dirty="0">
                         <a:latin typeface="Arial" charset="0"/>
@@ -2810,7 +2483,7 @@
                           <a:ea typeface="Arial" pitchFamily="34" charset="-122"/>
                           <a:cs typeface="Arial" pitchFamily="34" charset="-120"/>
                         </a:rPr>
-                        <a:t>46,000</a:t>
+                        <a:t>24,000</a:t>
                       </a:r>
                       <a:endParaRPr lang="en-US" sz="1300" dirty="0">
                         <a:latin typeface="Arial" charset="0"/>
@@ -2875,7 +2548,7 @@
                           <a:ea typeface="Arial" pitchFamily="34" charset="-122"/>
                           <a:cs typeface="Arial" pitchFamily="34" charset="-120"/>
                         </a:rPr>
-                        <a:t>Founders, lean hiring path</a:t>
+                        <a:t>3 founders on equity, $100 → $500 / month allowance; 1 support hire in Year 3</a:t>
                       </a:r>
                       <a:endParaRPr lang="en-US" sz="1300" dirty="0">
                         <a:latin typeface="Arial" charset="0"/>
@@ -2924,7 +2597,7 @@
                   </a:tcPr>
                 </a:tc>
               </a:tr>
-              <a:tr h="475488">
+              <a:tr h="457200">
                 <a:tc>
                   <a:txBody>
                     <a:bodyPr/>
@@ -3007,7 +2680,7 @@
                           <a:ea typeface="Arial" pitchFamily="34" charset="-122"/>
                           <a:cs typeface="Arial" pitchFamily="34" charset="-120"/>
                         </a:rPr>
-                        <a:t>4,110</a:t>
+                        <a:t>1,458</a:t>
                       </a:r>
                       <a:endParaRPr lang="en-US" sz="1300" dirty="0">
                         <a:latin typeface="Arial" charset="0"/>
@@ -3072,7 +2745,7 @@
                           <a:ea typeface="Arial" pitchFamily="34" charset="-122"/>
                           <a:cs typeface="Arial" pitchFamily="34" charset="-120"/>
                         </a:rPr>
-                        <a:t>10,450</a:t>
+                        <a:t>4,961</a:t>
                       </a:r>
                       <a:endParaRPr lang="en-US" sz="1300" dirty="0">
                         <a:latin typeface="Arial" charset="0"/>
@@ -3137,7 +2810,7 @@
                           <a:ea typeface="Arial" pitchFamily="34" charset="-122"/>
                           <a:cs typeface="Arial" pitchFamily="34" charset="-120"/>
                         </a:rPr>
-                        <a:t>16,450</a:t>
+                        <a:t>9,710</a:t>
                       </a:r>
                       <a:endParaRPr lang="en-US" sz="1300" dirty="0">
                         <a:latin typeface="Arial" charset="0"/>
@@ -3202,7 +2875,7 @@
                           <a:ea typeface="Arial" pitchFamily="34" charset="-122"/>
                           <a:cs typeface="Arial" pitchFamily="34" charset="-120"/>
                         </a:rPr>
-                        <a:t>Field onboarding, referrals, paid ads</a:t>
+                        <a:t>Facebook ads $100 → $600 / month, QR stands, festival campaigns, referral credit</a:t>
                       </a:r>
                       <a:endParaRPr lang="en-US" sz="1300" dirty="0">
                         <a:latin typeface="Arial" charset="0"/>
@@ -3251,7 +2924,7 @@
                   </a:tcPr>
                 </a:tc>
               </a:tr>
-              <a:tr h="475488">
+              <a:tr h="457200">
                 <a:tc>
                   <a:txBody>
                     <a:bodyPr/>
@@ -3334,7 +3007,7 @@
                           <a:ea typeface="Arial" pitchFamily="34" charset="-122"/>
                           <a:cs typeface="Arial" pitchFamily="34" charset="-120"/>
                         </a:rPr>
-                        <a:t>4,355</a:t>
+                        <a:t>1,560</a:t>
                       </a:r>
                       <a:endParaRPr lang="en-US" sz="1300" dirty="0">
                         <a:latin typeface="Arial" charset="0"/>
@@ -3399,7 +3072,7 @@
                           <a:ea typeface="Arial" pitchFamily="34" charset="-122"/>
                           <a:cs typeface="Arial" pitchFamily="34" charset="-120"/>
                         </a:rPr>
-                        <a:t>7,190</a:t>
+                        <a:t>1,320</a:t>
                       </a:r>
                       <a:endParaRPr lang="en-US" sz="1300" dirty="0">
                         <a:latin typeface="Arial" charset="0"/>
@@ -3464,7 +3137,7 @@
                           <a:ea typeface="Arial" pitchFamily="34" charset="-122"/>
                           <a:cs typeface="Arial" pitchFamily="34" charset="-120"/>
                         </a:rPr>
-                        <a:t>9,700</a:t>
+                        <a:t>3,720</a:t>
                       </a:r>
                       <a:endParaRPr lang="en-US" sz="1300" dirty="0">
                         <a:latin typeface="Arial" charset="0"/>
@@ -3529,7 +3202,7 @@
                           <a:ea typeface="Arial" pitchFamily="34" charset="-122"/>
                           <a:cs typeface="Arial" pitchFamily="34" charset="-120"/>
                         </a:rPr>
-                        <a:t>Fixed lean overhead</a:t>
+                        <a:t>AI tools, company registration (~$840), accountant, coworking in Year 3</a:t>
                       </a:r>
                       <a:endParaRPr lang="en-US" sz="1300" dirty="0">
                         <a:latin typeface="Arial" charset="0"/>
@@ -3578,7 +3251,334 @@
                   </a:tcPr>
                 </a:tc>
               </a:tr>
-              <a:tr h="475488">
+              <a:tr h="457200">
+                <a:tc>
+                  <a:txBody>
+                    <a:bodyPr/>
+                    <a:lstStyle/>
+                    <a:p>
+                      <a:pPr indent="0" marL="0">
+                        <a:buNone/>
+                      </a:pPr>
+                      <a:r>
+                        <a:rPr lang="en-US" sz="1300" dirty="0">
+                          <a:solidFill>
+                            <a:srgbClr val="15243A"/>
+                          </a:solidFill>
+                          <a:latin typeface="Arial" pitchFamily="34" charset="0"/>
+                          <a:ea typeface="Arial" pitchFamily="34" charset="-122"/>
+                          <a:cs typeface="Arial" pitchFamily="34" charset="-120"/>
+                        </a:rPr>
+                        <a:t>Tax</a:t>
+                      </a:r>
+                      <a:endParaRPr lang="en-US" sz="1300" dirty="0">
+                        <a:latin typeface="Arial" charset="0"/>
+                        <a:ea typeface="Arial" charset="0"/>
+                        <a:cs typeface="Arial" charset="0"/>
+                      </a:endParaRPr>
+                    </a:p>
+                  </a:txBody>
+                  <a:tcPr marL="73152" marR="73152" marT="73152" marB="73152" anchor="ctr">
+                    <a:lnL w="9525" cap="flat" cmpd="sng" algn="ctr">
+                      <a:solidFill>
+                        <a:srgbClr val="D7E1ED"/>
+                      </a:solidFill>
+                      <a:prstDash val="solid"/>
+                      <a:round/>
+                      <a:headEnd type="none" w="med" len="med"/>
+                      <a:tailEnd type="none" w="med" len="med"/>
+                    </a:lnL>
+                    <a:lnR w="9525" cap="flat" cmpd="sng" algn="ctr">
+                      <a:solidFill>
+                        <a:srgbClr val="D7E1ED"/>
+                      </a:solidFill>
+                      <a:prstDash val="solid"/>
+                      <a:round/>
+                      <a:headEnd type="none" w="med" len="med"/>
+                      <a:tailEnd type="none" w="med" len="med"/>
+                    </a:lnR>
+                    <a:lnT w="9525" cap="flat" cmpd="sng" algn="ctr">
+                      <a:solidFill>
+                        <a:srgbClr val="D7E1ED"/>
+                      </a:solidFill>
+                      <a:prstDash val="solid"/>
+                      <a:round/>
+                      <a:headEnd type="none" w="med" len="med"/>
+                      <a:tailEnd type="none" w="med" len="med"/>
+                    </a:lnT>
+                    <a:lnB w="9525" cap="flat" cmpd="sng" algn="ctr">
+                      <a:solidFill>
+                        <a:srgbClr val="D7E1ED"/>
+                      </a:solidFill>
+                      <a:prstDash val="solid"/>
+                      <a:round/>
+                      <a:headEnd type="none" w="med" len="med"/>
+                      <a:tailEnd type="none" w="med" len="med"/>
+                    </a:lnB>
+                  </a:tcPr>
+                </a:tc>
+                <a:tc>
+                  <a:txBody>
+                    <a:bodyPr/>
+                    <a:lstStyle/>
+                    <a:p>
+                      <a:pPr algn="r" indent="0" marL="0">
+                        <a:buNone/>
+                      </a:pPr>
+                      <a:r>
+                        <a:rPr lang="en-US" sz="1300" dirty="0">
+                          <a:solidFill>
+                            <a:srgbClr val="15243A"/>
+                          </a:solidFill>
+                          <a:latin typeface="Arial" pitchFamily="34" charset="0"/>
+                          <a:ea typeface="Arial" pitchFamily="34" charset="-122"/>
+                          <a:cs typeface="Arial" pitchFamily="34" charset="-120"/>
+                        </a:rPr>
+                        <a:t>35</a:t>
+                      </a:r>
+                      <a:endParaRPr lang="en-US" sz="1300" dirty="0">
+                        <a:latin typeface="Arial" charset="0"/>
+                        <a:ea typeface="Arial" charset="0"/>
+                        <a:cs typeface="Arial" charset="0"/>
+                      </a:endParaRPr>
+                    </a:p>
+                  </a:txBody>
+                  <a:tcPr marL="73152" marR="73152" marT="73152" marB="73152" anchor="ctr">
+                    <a:lnL w="9525" cap="flat" cmpd="sng" algn="ctr">
+                      <a:solidFill>
+                        <a:srgbClr val="D7E1ED"/>
+                      </a:solidFill>
+                      <a:prstDash val="solid"/>
+                      <a:round/>
+                      <a:headEnd type="none" w="med" len="med"/>
+                      <a:tailEnd type="none" w="med" len="med"/>
+                    </a:lnL>
+                    <a:lnR w="9525" cap="flat" cmpd="sng" algn="ctr">
+                      <a:solidFill>
+                        <a:srgbClr val="D7E1ED"/>
+                      </a:solidFill>
+                      <a:prstDash val="solid"/>
+                      <a:round/>
+                      <a:headEnd type="none" w="med" len="med"/>
+                      <a:tailEnd type="none" w="med" len="med"/>
+                    </a:lnR>
+                    <a:lnT w="9525" cap="flat" cmpd="sng" algn="ctr">
+                      <a:solidFill>
+                        <a:srgbClr val="D7E1ED"/>
+                      </a:solidFill>
+                      <a:prstDash val="solid"/>
+                      <a:round/>
+                      <a:headEnd type="none" w="med" len="med"/>
+                      <a:tailEnd type="none" w="med" len="med"/>
+                    </a:lnT>
+                    <a:lnB w="9525" cap="flat" cmpd="sng" algn="ctr">
+                      <a:solidFill>
+                        <a:srgbClr val="D7E1ED"/>
+                      </a:solidFill>
+                      <a:prstDash val="solid"/>
+                      <a:round/>
+                      <a:headEnd type="none" w="med" len="med"/>
+                      <a:tailEnd type="none" w="med" len="med"/>
+                    </a:lnB>
+                  </a:tcPr>
+                </a:tc>
+                <a:tc>
+                  <a:txBody>
+                    <a:bodyPr/>
+                    <a:lstStyle/>
+                    <a:p>
+                      <a:pPr algn="r" indent="0" marL="0">
+                        <a:buNone/>
+                      </a:pPr>
+                      <a:r>
+                        <a:rPr lang="en-US" sz="1300" dirty="0">
+                          <a:solidFill>
+                            <a:srgbClr val="15243A"/>
+                          </a:solidFill>
+                          <a:latin typeface="Arial" pitchFamily="34" charset="0"/>
+                          <a:ea typeface="Arial" pitchFamily="34" charset="-122"/>
+                          <a:cs typeface="Arial" pitchFamily="34" charset="-120"/>
+                        </a:rPr>
+                        <a:t>582</a:t>
+                      </a:r>
+                      <a:endParaRPr lang="en-US" sz="1300" dirty="0">
+                        <a:latin typeface="Arial" charset="0"/>
+                        <a:ea typeface="Arial" charset="0"/>
+                        <a:cs typeface="Arial" charset="0"/>
+                      </a:endParaRPr>
+                    </a:p>
+                  </a:txBody>
+                  <a:tcPr marL="73152" marR="73152" marT="73152" marB="73152" anchor="ctr">
+                    <a:lnL w="9525" cap="flat" cmpd="sng" algn="ctr">
+                      <a:solidFill>
+                        <a:srgbClr val="D7E1ED"/>
+                      </a:solidFill>
+                      <a:prstDash val="solid"/>
+                      <a:round/>
+                      <a:headEnd type="none" w="med" len="med"/>
+                      <a:tailEnd type="none" w="med" len="med"/>
+                    </a:lnL>
+                    <a:lnR w="9525" cap="flat" cmpd="sng" algn="ctr">
+                      <a:solidFill>
+                        <a:srgbClr val="D7E1ED"/>
+                      </a:solidFill>
+                      <a:prstDash val="solid"/>
+                      <a:round/>
+                      <a:headEnd type="none" w="med" len="med"/>
+                      <a:tailEnd type="none" w="med" len="med"/>
+                    </a:lnR>
+                    <a:lnT w="9525" cap="flat" cmpd="sng" algn="ctr">
+                      <a:solidFill>
+                        <a:srgbClr val="D7E1ED"/>
+                      </a:solidFill>
+                      <a:prstDash val="solid"/>
+                      <a:round/>
+                      <a:headEnd type="none" w="med" len="med"/>
+                      <a:tailEnd type="none" w="med" len="med"/>
+                    </a:lnT>
+                    <a:lnB w="9525" cap="flat" cmpd="sng" algn="ctr">
+                      <a:solidFill>
+                        <a:srgbClr val="D7E1ED"/>
+                      </a:solidFill>
+                      <a:prstDash val="solid"/>
+                      <a:round/>
+                      <a:headEnd type="none" w="med" len="med"/>
+                      <a:tailEnd type="none" w="med" len="med"/>
+                    </a:lnB>
+                  </a:tcPr>
+                </a:tc>
+                <a:tc>
+                  <a:txBody>
+                    <a:bodyPr/>
+                    <a:lstStyle/>
+                    <a:p>
+                      <a:pPr algn="r" indent="0" marL="0">
+                        <a:buNone/>
+                      </a:pPr>
+                      <a:r>
+                        <a:rPr lang="en-US" sz="1300" dirty="0">
+                          <a:solidFill>
+                            <a:srgbClr val="15243A"/>
+                          </a:solidFill>
+                          <a:latin typeface="Arial" pitchFamily="34" charset="0"/>
+                          <a:ea typeface="Arial" pitchFamily="34" charset="-122"/>
+                          <a:cs typeface="Arial" pitchFamily="34" charset="-120"/>
+                        </a:rPr>
+                        <a:t>5,534</a:t>
+                      </a:r>
+                      <a:endParaRPr lang="en-US" sz="1300" dirty="0">
+                        <a:latin typeface="Arial" charset="0"/>
+                        <a:ea typeface="Arial" charset="0"/>
+                        <a:cs typeface="Arial" charset="0"/>
+                      </a:endParaRPr>
+                    </a:p>
+                  </a:txBody>
+                  <a:tcPr marL="73152" marR="73152" marT="73152" marB="73152" anchor="ctr">
+                    <a:lnL w="9525" cap="flat" cmpd="sng" algn="ctr">
+                      <a:solidFill>
+                        <a:srgbClr val="D7E1ED"/>
+                      </a:solidFill>
+                      <a:prstDash val="solid"/>
+                      <a:round/>
+                      <a:headEnd type="none" w="med" len="med"/>
+                      <a:tailEnd type="none" w="med" len="med"/>
+                    </a:lnL>
+                    <a:lnR w="9525" cap="flat" cmpd="sng" algn="ctr">
+                      <a:solidFill>
+                        <a:srgbClr val="D7E1ED"/>
+                      </a:solidFill>
+                      <a:prstDash val="solid"/>
+                      <a:round/>
+                      <a:headEnd type="none" w="med" len="med"/>
+                      <a:tailEnd type="none" w="med" len="med"/>
+                    </a:lnR>
+                    <a:lnT w="9525" cap="flat" cmpd="sng" algn="ctr">
+                      <a:solidFill>
+                        <a:srgbClr val="D7E1ED"/>
+                      </a:solidFill>
+                      <a:prstDash val="solid"/>
+                      <a:round/>
+                      <a:headEnd type="none" w="med" len="med"/>
+                      <a:tailEnd type="none" w="med" len="med"/>
+                    </a:lnT>
+                    <a:lnB w="9525" cap="flat" cmpd="sng" algn="ctr">
+                      <a:solidFill>
+                        <a:srgbClr val="D7E1ED"/>
+                      </a:solidFill>
+                      <a:prstDash val="solid"/>
+                      <a:round/>
+                      <a:headEnd type="none" w="med" len="med"/>
+                      <a:tailEnd type="none" w="med" len="med"/>
+                    </a:lnB>
+                  </a:tcPr>
+                </a:tc>
+                <a:tc>
+                  <a:txBody>
+                    <a:bodyPr/>
+                    <a:lstStyle/>
+                    <a:p>
+                      <a:pPr indent="0" marL="0">
+                        <a:buNone/>
+                      </a:pPr>
+                      <a:r>
+                        <a:rPr lang="en-US" sz="1300" dirty="0">
+                          <a:solidFill>
+                            <a:srgbClr val="15243A"/>
+                          </a:solidFill>
+                          <a:latin typeface="Arial" pitchFamily="34" charset="0"/>
+                          <a:ea typeface="Arial" pitchFamily="34" charset="-122"/>
+                          <a:cs typeface="Arial" pitchFamily="34" charset="-120"/>
+                        </a:rPr>
+                        <a:t>1% minimum tax; 20% profit tax after earlier losses</a:t>
+                      </a:r>
+                      <a:endParaRPr lang="en-US" sz="1300" dirty="0">
+                        <a:latin typeface="Arial" charset="0"/>
+                        <a:ea typeface="Arial" charset="0"/>
+                        <a:cs typeface="Arial" charset="0"/>
+                      </a:endParaRPr>
+                    </a:p>
+                  </a:txBody>
+                  <a:tcPr marL="73152" marR="73152" marT="73152" marB="73152" anchor="ctr">
+                    <a:lnL w="9525" cap="flat" cmpd="sng" algn="ctr">
+                      <a:solidFill>
+                        <a:srgbClr val="D7E1ED"/>
+                      </a:solidFill>
+                      <a:prstDash val="solid"/>
+                      <a:round/>
+                      <a:headEnd type="none" w="med" len="med"/>
+                      <a:tailEnd type="none" w="med" len="med"/>
+                    </a:lnL>
+                    <a:lnR w="9525" cap="flat" cmpd="sng" algn="ctr">
+                      <a:solidFill>
+                        <a:srgbClr val="D7E1ED"/>
+                      </a:solidFill>
+                      <a:prstDash val="solid"/>
+                      <a:round/>
+                      <a:headEnd type="none" w="med" len="med"/>
+                      <a:tailEnd type="none" w="med" len="med"/>
+                    </a:lnR>
+                    <a:lnT w="9525" cap="flat" cmpd="sng" algn="ctr">
+                      <a:solidFill>
+                        <a:srgbClr val="D7E1ED"/>
+                      </a:solidFill>
+                      <a:prstDash val="solid"/>
+                      <a:round/>
+                      <a:headEnd type="none" w="med" len="med"/>
+                      <a:tailEnd type="none" w="med" len="med"/>
+                    </a:lnT>
+                    <a:lnB w="9525" cap="flat" cmpd="sng" algn="ctr">
+                      <a:solidFill>
+                        <a:srgbClr val="D7E1ED"/>
+                      </a:solidFill>
+                      <a:prstDash val="solid"/>
+                      <a:round/>
+                      <a:headEnd type="none" w="med" len="med"/>
+                      <a:tailEnd type="none" w="med" len="med"/>
+                    </a:lnB>
+                  </a:tcPr>
+                </a:tc>
+              </a:tr>
+              <a:tr h="457200">
                 <a:tc>
                   <a:txBody>
                     <a:bodyPr/>
@@ -3664,7 +3664,7 @@
                           <a:ea typeface="Arial" pitchFamily="34" charset="-122"/>
                           <a:cs typeface="Arial" pitchFamily="34" charset="-120"/>
                         </a:rPr>
-                        <a:t>–26,802</a:t>
+                        <a:t>–3,799</a:t>
                       </a:r>
                       <a:endParaRPr lang="en-US" sz="1300" dirty="0">
                         <a:latin typeface="Arial" charset="0"/>
@@ -3732,7 +3732,7 @@
                           <a:ea typeface="Arial" pitchFamily="34" charset="-122"/>
                           <a:cs typeface="Arial" pitchFamily="34" charset="-120"/>
                         </a:rPr>
-                        <a:t>–36,747</a:t>
+                        <a:t>6,092</a:t>
                       </a:r>
                       <a:endParaRPr lang="en-US" sz="1300" dirty="0">
                         <a:latin typeface="Arial" charset="0"/>
@@ -3800,7 +3800,7 @@
                           <a:ea typeface="Arial" pitchFamily="34" charset="-122"/>
                           <a:cs typeface="Arial" pitchFamily="34" charset="-120"/>
                         </a:rPr>
-                        <a:t>–26,076</a:t>
+                        <a:t>22,137</a:t>
                       </a:r>
                       <a:endParaRPr lang="en-US" sz="1300" dirty="0">
                         <a:latin typeface="Arial" charset="0"/>
@@ -3868,7 +3868,7 @@
                           <a:ea typeface="Arial" pitchFamily="34" charset="-122"/>
                           <a:cs typeface="Arial" pitchFamily="34" charset="-120"/>
                         </a:rPr>
-                        <a:t>No tax while loss-making</a:t>
+                        <a:t>Base case: subscriptions only</a:t>
                       </a:r>
                       <a:endParaRPr lang="en-US" sz="1300" dirty="0">
                         <a:latin typeface="Arial" charset="0"/>
@@ -3917,6 +3917,333 @@
                     <a:solidFill>
                       <a:srgbClr val="F1F5F9"/>
                     </a:solidFill>
+                  </a:tcPr>
+                </a:tc>
+              </a:tr>
+              <a:tr h="457200">
+                <a:tc>
+                  <a:txBody>
+                    <a:bodyPr/>
+                    <a:lstStyle/>
+                    <a:p>
+                      <a:pPr indent="0" marL="0">
+                        <a:buNone/>
+                      </a:pPr>
+                      <a:r>
+                        <a:rPr lang="en-US" sz="1300" dirty="0">
+                          <a:solidFill>
+                            <a:srgbClr val="15243A"/>
+                          </a:solidFill>
+                          <a:latin typeface="Arial" pitchFamily="34" charset="0"/>
+                          <a:ea typeface="Arial" pitchFamily="34" charset="-122"/>
+                          <a:cs typeface="Arial" pitchFamily="34" charset="-120"/>
+                        </a:rPr>
+                        <a:t>With 3% commission</a:t>
+                      </a:r>
+                      <a:endParaRPr lang="en-US" sz="1300" dirty="0">
+                        <a:latin typeface="Arial" charset="0"/>
+                        <a:ea typeface="Arial" charset="0"/>
+                        <a:cs typeface="Arial" charset="0"/>
+                      </a:endParaRPr>
+                    </a:p>
+                  </a:txBody>
+                  <a:tcPr marL="73152" marR="73152" marT="73152" marB="73152" anchor="ctr">
+                    <a:lnL w="9525" cap="flat" cmpd="sng" algn="ctr">
+                      <a:solidFill>
+                        <a:srgbClr val="D7E1ED"/>
+                      </a:solidFill>
+                      <a:prstDash val="solid"/>
+                      <a:round/>
+                      <a:headEnd type="none" w="med" len="med"/>
+                      <a:tailEnd type="none" w="med" len="med"/>
+                    </a:lnL>
+                    <a:lnR w="9525" cap="flat" cmpd="sng" algn="ctr">
+                      <a:solidFill>
+                        <a:srgbClr val="D7E1ED"/>
+                      </a:solidFill>
+                      <a:prstDash val="solid"/>
+                      <a:round/>
+                      <a:headEnd type="none" w="med" len="med"/>
+                      <a:tailEnd type="none" w="med" len="med"/>
+                    </a:lnR>
+                    <a:lnT w="9525" cap="flat" cmpd="sng" algn="ctr">
+                      <a:solidFill>
+                        <a:srgbClr val="D7E1ED"/>
+                      </a:solidFill>
+                      <a:prstDash val="solid"/>
+                      <a:round/>
+                      <a:headEnd type="none" w="med" len="med"/>
+                      <a:tailEnd type="none" w="med" len="med"/>
+                    </a:lnT>
+                    <a:lnB w="9525" cap="flat" cmpd="sng" algn="ctr">
+                      <a:solidFill>
+                        <a:srgbClr val="D7E1ED"/>
+                      </a:solidFill>
+                      <a:prstDash val="solid"/>
+                      <a:round/>
+                      <a:headEnd type="none" w="med" len="med"/>
+                      <a:tailEnd type="none" w="med" len="med"/>
+                    </a:lnB>
+                  </a:tcPr>
+                </a:tc>
+                <a:tc>
+                  <a:txBody>
+                    <a:bodyPr/>
+                    <a:lstStyle/>
+                    <a:p>
+                      <a:pPr algn="r" indent="0" marL="0">
+                        <a:buNone/>
+                      </a:pPr>
+                      <a:r>
+                        <a:rPr lang="en-US" sz="1300" dirty="0">
+                          <a:solidFill>
+                            <a:srgbClr val="15243A"/>
+                          </a:solidFill>
+                          <a:latin typeface="Arial" pitchFamily="34" charset="0"/>
+                          <a:ea typeface="Arial" pitchFamily="34" charset="-122"/>
+                          <a:cs typeface="Arial" pitchFamily="34" charset="-120"/>
+                        </a:rPr>
+                        <a:t>–3,543</a:t>
+                      </a:r>
+                      <a:endParaRPr lang="en-US" sz="1300" dirty="0">
+                        <a:latin typeface="Arial" charset="0"/>
+                        <a:ea typeface="Arial" charset="0"/>
+                        <a:cs typeface="Arial" charset="0"/>
+                      </a:endParaRPr>
+                    </a:p>
+                  </a:txBody>
+                  <a:tcPr marL="73152" marR="73152" marT="73152" marB="73152" anchor="ctr">
+                    <a:lnL w="9525" cap="flat" cmpd="sng" algn="ctr">
+                      <a:solidFill>
+                        <a:srgbClr val="D7E1ED"/>
+                      </a:solidFill>
+                      <a:prstDash val="solid"/>
+                      <a:round/>
+                      <a:headEnd type="none" w="med" len="med"/>
+                      <a:tailEnd type="none" w="med" len="med"/>
+                    </a:lnL>
+                    <a:lnR w="9525" cap="flat" cmpd="sng" algn="ctr">
+                      <a:solidFill>
+                        <a:srgbClr val="D7E1ED"/>
+                      </a:solidFill>
+                      <a:prstDash val="solid"/>
+                      <a:round/>
+                      <a:headEnd type="none" w="med" len="med"/>
+                      <a:tailEnd type="none" w="med" len="med"/>
+                    </a:lnR>
+                    <a:lnT w="9525" cap="flat" cmpd="sng" algn="ctr">
+                      <a:solidFill>
+                        <a:srgbClr val="D7E1ED"/>
+                      </a:solidFill>
+                      <a:prstDash val="solid"/>
+                      <a:round/>
+                      <a:headEnd type="none" w="med" len="med"/>
+                      <a:tailEnd type="none" w="med" len="med"/>
+                    </a:lnT>
+                    <a:lnB w="9525" cap="flat" cmpd="sng" algn="ctr">
+                      <a:solidFill>
+                        <a:srgbClr val="D7E1ED"/>
+                      </a:solidFill>
+                      <a:prstDash val="solid"/>
+                      <a:round/>
+                      <a:headEnd type="none" w="med" len="med"/>
+                      <a:tailEnd type="none" w="med" len="med"/>
+                    </a:lnB>
+                  </a:tcPr>
+                </a:tc>
+                <a:tc>
+                  <a:txBody>
+                    <a:bodyPr/>
+                    <a:lstStyle/>
+                    <a:p>
+                      <a:pPr algn="r" indent="0" marL="0">
+                        <a:buNone/>
+                      </a:pPr>
+                      <a:r>
+                        <a:rPr lang="en-US" sz="1300" dirty="0">
+                          <a:solidFill>
+                            <a:srgbClr val="15243A"/>
+                          </a:solidFill>
+                          <a:latin typeface="Arial" pitchFamily="34" charset="0"/>
+                          <a:ea typeface="Arial" pitchFamily="34" charset="-122"/>
+                          <a:cs typeface="Arial" pitchFamily="34" charset="-120"/>
+                        </a:rPr>
+                        <a:t>10,563</a:t>
+                      </a:r>
+                      <a:endParaRPr lang="en-US" sz="1300" dirty="0">
+                        <a:latin typeface="Arial" charset="0"/>
+                        <a:ea typeface="Arial" charset="0"/>
+                        <a:cs typeface="Arial" charset="0"/>
+                      </a:endParaRPr>
+                    </a:p>
+                  </a:txBody>
+                  <a:tcPr marL="73152" marR="73152" marT="73152" marB="73152" anchor="ctr">
+                    <a:lnL w="9525" cap="flat" cmpd="sng" algn="ctr">
+                      <a:solidFill>
+                        <a:srgbClr val="D7E1ED"/>
+                      </a:solidFill>
+                      <a:prstDash val="solid"/>
+                      <a:round/>
+                      <a:headEnd type="none" w="med" len="med"/>
+                      <a:tailEnd type="none" w="med" len="med"/>
+                    </a:lnL>
+                    <a:lnR w="9525" cap="flat" cmpd="sng" algn="ctr">
+                      <a:solidFill>
+                        <a:srgbClr val="D7E1ED"/>
+                      </a:solidFill>
+                      <a:prstDash val="solid"/>
+                      <a:round/>
+                      <a:headEnd type="none" w="med" len="med"/>
+                      <a:tailEnd type="none" w="med" len="med"/>
+                    </a:lnR>
+                    <a:lnT w="9525" cap="flat" cmpd="sng" algn="ctr">
+                      <a:solidFill>
+                        <a:srgbClr val="D7E1ED"/>
+                      </a:solidFill>
+                      <a:prstDash val="solid"/>
+                      <a:round/>
+                      <a:headEnd type="none" w="med" len="med"/>
+                      <a:tailEnd type="none" w="med" len="med"/>
+                    </a:lnT>
+                    <a:lnB w="9525" cap="flat" cmpd="sng" algn="ctr">
+                      <a:solidFill>
+                        <a:srgbClr val="D7E1ED"/>
+                      </a:solidFill>
+                      <a:prstDash val="solid"/>
+                      <a:round/>
+                      <a:headEnd type="none" w="med" len="med"/>
+                      <a:tailEnd type="none" w="med" len="med"/>
+                    </a:lnB>
+                  </a:tcPr>
+                </a:tc>
+                <a:tc>
+                  <a:txBody>
+                    <a:bodyPr/>
+                    <a:lstStyle/>
+                    <a:p>
+                      <a:pPr algn="r" indent="0" marL="0">
+                        <a:buNone/>
+                      </a:pPr>
+                      <a:r>
+                        <a:rPr lang="en-US" sz="1300" dirty="0">
+                          <a:solidFill>
+                            <a:srgbClr val="15243A"/>
+                          </a:solidFill>
+                          <a:latin typeface="Arial" pitchFamily="34" charset="0"/>
+                          <a:ea typeface="Arial" pitchFamily="34" charset="-122"/>
+                          <a:cs typeface="Arial" pitchFamily="34" charset="-120"/>
+                        </a:rPr>
+                        <a:t>38,395</a:t>
+                      </a:r>
+                      <a:endParaRPr lang="en-US" sz="1300" dirty="0">
+                        <a:latin typeface="Arial" charset="0"/>
+                        <a:ea typeface="Arial" charset="0"/>
+                        <a:cs typeface="Arial" charset="0"/>
+                      </a:endParaRPr>
+                    </a:p>
+                  </a:txBody>
+                  <a:tcPr marL="73152" marR="73152" marT="73152" marB="73152" anchor="ctr">
+                    <a:lnL w="9525" cap="flat" cmpd="sng" algn="ctr">
+                      <a:solidFill>
+                        <a:srgbClr val="D7E1ED"/>
+                      </a:solidFill>
+                      <a:prstDash val="solid"/>
+                      <a:round/>
+                      <a:headEnd type="none" w="med" len="med"/>
+                      <a:tailEnd type="none" w="med" len="med"/>
+                    </a:lnL>
+                    <a:lnR w="9525" cap="flat" cmpd="sng" algn="ctr">
+                      <a:solidFill>
+                        <a:srgbClr val="D7E1ED"/>
+                      </a:solidFill>
+                      <a:prstDash val="solid"/>
+                      <a:round/>
+                      <a:headEnd type="none" w="med" len="med"/>
+                      <a:tailEnd type="none" w="med" len="med"/>
+                    </a:lnR>
+                    <a:lnT w="9525" cap="flat" cmpd="sng" algn="ctr">
+                      <a:solidFill>
+                        <a:srgbClr val="D7E1ED"/>
+                      </a:solidFill>
+                      <a:prstDash val="solid"/>
+                      <a:round/>
+                      <a:headEnd type="none" w="med" len="med"/>
+                      <a:tailEnd type="none" w="med" len="med"/>
+                    </a:lnT>
+                    <a:lnB w="9525" cap="flat" cmpd="sng" algn="ctr">
+                      <a:solidFill>
+                        <a:srgbClr val="D7E1ED"/>
+                      </a:solidFill>
+                      <a:prstDash val="solid"/>
+                      <a:round/>
+                      <a:headEnd type="none" w="med" len="med"/>
+                      <a:tailEnd type="none" w="med" len="med"/>
+                    </a:lnB>
+                  </a:tcPr>
+                </a:tc>
+                <a:tc>
+                  <a:txBody>
+                    <a:bodyPr/>
+                    <a:lstStyle/>
+                    <a:p>
+                      <a:pPr indent="0" marL="0">
+                        <a:buNone/>
+                      </a:pPr>
+                      <a:r>
+                        <a:rPr lang="en-US" sz="1300" dirty="0">
+                          <a:solidFill>
+                            <a:srgbClr val="15243A"/>
+                          </a:solidFill>
+                          <a:latin typeface="Arial" pitchFamily="34" charset="0"/>
+                          <a:ea typeface="Arial" pitchFamily="34" charset="-122"/>
+                          <a:cs typeface="Arial" pitchFamily="34" charset="-120"/>
+                        </a:rPr>
+                        <a:t>Half of shops get 2 → 4 marketplace orders / month at $15</a:t>
+                      </a:r>
+                      <a:endParaRPr lang="en-US" sz="1300" dirty="0">
+                        <a:latin typeface="Arial" charset="0"/>
+                        <a:ea typeface="Arial" charset="0"/>
+                        <a:cs typeface="Arial" charset="0"/>
+                      </a:endParaRPr>
+                    </a:p>
+                  </a:txBody>
+                  <a:tcPr marL="73152" marR="73152" marT="73152" marB="73152" anchor="ctr">
+                    <a:lnL w="9525" cap="flat" cmpd="sng" algn="ctr">
+                      <a:solidFill>
+                        <a:srgbClr val="D7E1ED"/>
+                      </a:solidFill>
+                      <a:prstDash val="solid"/>
+                      <a:round/>
+                      <a:headEnd type="none" w="med" len="med"/>
+                      <a:tailEnd type="none" w="med" len="med"/>
+                    </a:lnL>
+                    <a:lnR w="9525" cap="flat" cmpd="sng" algn="ctr">
+                      <a:solidFill>
+                        <a:srgbClr val="D7E1ED"/>
+                      </a:solidFill>
+                      <a:prstDash val="solid"/>
+                      <a:round/>
+                      <a:headEnd type="none" w="med" len="med"/>
+                      <a:tailEnd type="none" w="med" len="med"/>
+                    </a:lnR>
+                    <a:lnT w="9525" cap="flat" cmpd="sng" algn="ctr">
+                      <a:solidFill>
+                        <a:srgbClr val="D7E1ED"/>
+                      </a:solidFill>
+                      <a:prstDash val="solid"/>
+                      <a:round/>
+                      <a:headEnd type="none" w="med" len="med"/>
+                      <a:tailEnd type="none" w="med" len="med"/>
+                    </a:lnT>
+                    <a:lnB w="9525" cap="flat" cmpd="sng" algn="ctr">
+                      <a:solidFill>
+                        <a:srgbClr val="D7E1ED"/>
+                      </a:solidFill>
+                      <a:prstDash val="solid"/>
+                      <a:round/>
+                      <a:headEnd type="none" w="med" len="med"/>
+                      <a:tailEnd type="none" w="med" len="med"/>
+                    </a:lnB>
                   </a:tcPr>
                 </a:tc>
               </a:tr>
@@ -3957,7 +4284,7 @@
                 <a:ea typeface="Arial" pitchFamily="34" charset="-122"/>
                 <a:cs typeface="Arial" pitchFamily="34" charset="-120"/>
               </a:rPr>
-              <a:t>Break-even: about 1,895 paying shops (Month-36 operating cost ÷ contribution per shop) — 2.9% of the 65,433-store SAM. All inputs are assumptions to validate in the pilot.</a:t>
+              <a:t>Break-even: about 670 paying shops at Year-3 costs (1.0% of the 65,433-store SAM). If founders earned $1,000 / month, Year 3 would still be about +$7.7K. Prices: DigitalOcean, Resend, Ministry of Commerce, checked Sept 2026. Model: docs/rentify-financial-model.xlsx.</a:t>
             </a:r>
             <a:endParaRPr lang="en-US" sz="1000" dirty="0"/>
           </a:p>

--- a/output/drafts/Rentify_v6_slide17_financial-detail.pptx
+++ b/output/drafts/Rentify_v6_slide17_financial-detail.pptx
@@ -1368,7 +1368,7 @@
                           <a:ea typeface="Arial" pitchFamily="34" charset="-122"/>
                           <a:cs typeface="Arial" pitchFamily="34" charset="-120"/>
                         </a:rPr>
-                        <a:t>3,456</a:t>
+                        <a:t>3,142</a:t>
                       </a:r>
                       <a:endParaRPr lang="en-US" sz="1300" dirty="0">
                         <a:latin typeface="Arial" charset="0"/>
@@ -1433,7 +1433,7 @@
                           <a:ea typeface="Arial" pitchFamily="34" charset="-122"/>
                           <a:cs typeface="Arial" pitchFamily="34" charset="-120"/>
                         </a:rPr>
-                        <a:t>25,131</a:t>
+                        <a:t>22,846</a:t>
                       </a:r>
                       <a:endParaRPr lang="en-US" sz="1300" dirty="0">
                         <a:latin typeface="Arial" charset="0"/>
@@ -1498,7 +1498,7 @@
                           <a:ea typeface="Arial" pitchFamily="34" charset="-122"/>
                           <a:cs typeface="Arial" pitchFamily="34" charset="-120"/>
                         </a:rPr>
-                        <a:t>67,744</a:t>
+                        <a:t>61,586</a:t>
                       </a:r>
                       <a:endParaRPr lang="en-US" sz="1300" dirty="0">
                         <a:latin typeface="Arial" charset="0"/>
@@ -1563,7 +1563,7 @@
                           <a:ea typeface="Arial" pitchFamily="34" charset="-122"/>
                           <a:cs typeface="Arial" pitchFamily="34" charset="-120"/>
                         </a:rPr>
-                        <a:t>Paying shops 58 → 419 → 1,129 (team model) × $5 average plan</a:t>
+                        <a:t>Paying shops 58 → 419 → 1,129 × $5 plan; 10% VAT removed</a:t>
                       </a:r>
                       <a:endParaRPr lang="en-US" sz="1300" dirty="0">
                         <a:latin typeface="Arial" charset="0"/>
@@ -1695,7 +1695,7 @@
                           <a:ea typeface="Arial" pitchFamily="34" charset="-122"/>
                           <a:cs typeface="Arial" pitchFamily="34" charset="-120"/>
                         </a:rPr>
-                        <a:t>603</a:t>
+                        <a:t>687</a:t>
                       </a:r>
                       <a:endParaRPr lang="en-US" sz="1300" dirty="0">
                         <a:latin typeface="Arial" charset="0"/>
@@ -1760,7 +1760,7 @@
                           <a:ea typeface="Arial" pitchFamily="34" charset="-122"/>
                           <a:cs typeface="Arial" pitchFamily="34" charset="-120"/>
                         </a:rPr>
-                        <a:t>1,376</a:t>
+                        <a:t>1,569</a:t>
                       </a:r>
                       <a:endParaRPr lang="en-US" sz="1300" dirty="0">
                         <a:latin typeface="Arial" charset="0"/>
@@ -1825,7 +1825,7 @@
                           <a:ea typeface="Arial" pitchFamily="34" charset="-122"/>
                           <a:cs typeface="Arial" pitchFamily="34" charset="-120"/>
                         </a:rPr>
-                        <a:t>2,643</a:t>
+                        <a:t>3,013</a:t>
                       </a:r>
                       <a:endParaRPr lang="en-US" sz="1300" dirty="0">
                         <a:latin typeface="Arial" charset="0"/>
@@ -1890,7 +1890,7 @@
                           <a:ea typeface="Arial" pitchFamily="34" charset="-122"/>
                           <a:cs typeface="Arial" pitchFamily="34" charset="-120"/>
                         </a:rPr>
-                        <a:t>Servers, database, photo storage, email: $50 → $225 / month</a:t>
+                        <a:t>Servers, database, storage, email ($50 → $225 / month) + 14% withholding</a:t>
                       </a:r>
                       <a:endParaRPr lang="en-US" sz="1300" dirty="0">
                         <a:latin typeface="Arial" charset="0"/>
@@ -2025,7 +2025,7 @@
                           <a:ea typeface="Arial" pitchFamily="34" charset="-122"/>
                           <a:cs typeface="Arial" pitchFamily="34" charset="-120"/>
                         </a:rPr>
-                        <a:t>2,853</a:t>
+                        <a:t>2,454</a:t>
                       </a:r>
                       <a:endParaRPr lang="en-US" sz="1300" dirty="0">
                         <a:latin typeface="Arial" charset="0"/>
@@ -2093,7 +2093,7 @@
                           <a:ea typeface="Arial" pitchFamily="34" charset="-122"/>
                           <a:cs typeface="Arial" pitchFamily="34" charset="-120"/>
                         </a:rPr>
-                        <a:t>23,755</a:t>
+                        <a:t>21,277</a:t>
                       </a:r>
                       <a:endParaRPr lang="en-US" sz="1300" dirty="0">
                         <a:latin typeface="Arial" charset="0"/>
@@ -2161,7 +2161,7 @@
                           <a:ea typeface="Arial" pitchFamily="34" charset="-122"/>
                           <a:cs typeface="Arial" pitchFamily="34" charset="-120"/>
                         </a:rPr>
-                        <a:t>65,101</a:t>
+                        <a:t>58,573</a:t>
                       </a:r>
                       <a:endParaRPr lang="en-US" sz="1300" dirty="0">
                         <a:latin typeface="Arial" charset="0"/>
@@ -2353,7 +2353,7 @@
                           <a:ea typeface="Arial" pitchFamily="34" charset="-122"/>
                           <a:cs typeface="Arial" pitchFamily="34" charset="-120"/>
                         </a:rPr>
-                        <a:t>3,600</a:t>
+                        <a:t>6,360</a:t>
                       </a:r>
                       <a:endParaRPr lang="en-US" sz="1300" dirty="0">
                         <a:latin typeface="Arial" charset="0"/>
@@ -2418,7 +2418,7 @@
                           <a:ea typeface="Arial" pitchFamily="34" charset="-122"/>
                           <a:cs typeface="Arial" pitchFamily="34" charset="-120"/>
                         </a:rPr>
-                        <a:t>10,800</a:t>
+                        <a:t>19,080</a:t>
                       </a:r>
                       <a:endParaRPr lang="en-US" sz="1300" dirty="0">
                         <a:latin typeface="Arial" charset="0"/>
@@ -2483,7 +2483,7 @@
                           <a:ea typeface="Arial" pitchFamily="34" charset="-122"/>
                           <a:cs typeface="Arial" pitchFamily="34" charset="-120"/>
                         </a:rPr>
-                        <a:t>24,000</a:t>
+                        <a:t>38,520</a:t>
                       </a:r>
                       <a:endParaRPr lang="en-US" sz="1300" dirty="0">
                         <a:latin typeface="Arial" charset="0"/>
@@ -2548,7 +2548,7 @@
                           <a:ea typeface="Arial" pitchFamily="34" charset="-122"/>
                           <a:cs typeface="Arial" pitchFamily="34" charset="-120"/>
                         </a:rPr>
-                        <a:t>3 founders on equity, $100 → $500 / month allowance; 1 support hire in Year 3</a:t>
+                        <a:t>5 founders on equity, $100 → $500 / month allowance; support hire in Year 3; NSSF</a:t>
                       </a:r>
                       <a:endParaRPr lang="en-US" sz="1300" dirty="0">
                         <a:latin typeface="Arial" charset="0"/>
@@ -2680,7 +2680,7 @@
                           <a:ea typeface="Arial" pitchFamily="34" charset="-122"/>
                           <a:cs typeface="Arial" pitchFamily="34" charset="-120"/>
                         </a:rPr>
-                        <a:t>1,458</a:t>
+                        <a:t>1,626</a:t>
                       </a:r>
                       <a:endParaRPr lang="en-US" sz="1300" dirty="0">
                         <a:latin typeface="Arial" charset="0"/>
@@ -2745,7 +2745,7 @@
                           <a:ea typeface="Arial" pitchFamily="34" charset="-122"/>
                           <a:cs typeface="Arial" pitchFamily="34" charset="-120"/>
                         </a:rPr>
-                        <a:t>4,961</a:t>
+                        <a:t>5,465</a:t>
                       </a:r>
                       <a:endParaRPr lang="en-US" sz="1300" dirty="0">
                         <a:latin typeface="Arial" charset="0"/>
@@ -2810,7 +2810,7 @@
                           <a:ea typeface="Arial" pitchFamily="34" charset="-122"/>
                           <a:cs typeface="Arial" pitchFamily="34" charset="-120"/>
                         </a:rPr>
-                        <a:t>9,710</a:t>
+                        <a:t>10,718</a:t>
                       </a:r>
                       <a:endParaRPr lang="en-US" sz="1300" dirty="0">
                         <a:latin typeface="Arial" charset="0"/>
@@ -3007,7 +3007,7 @@
                           <a:ea typeface="Arial" pitchFamily="34" charset="-122"/>
                           <a:cs typeface="Arial" pitchFamily="34" charset="-120"/>
                         </a:rPr>
-                        <a:t>1,560</a:t>
+                        <a:t>2,508</a:t>
                       </a:r>
                       <a:endParaRPr lang="en-US" sz="1300" dirty="0">
                         <a:latin typeface="Arial" charset="0"/>
@@ -3072,7 +3072,7 @@
                           <a:ea typeface="Arial" pitchFamily="34" charset="-122"/>
                           <a:cs typeface="Arial" pitchFamily="34" charset="-120"/>
                         </a:rPr>
-                        <a:t>1,320</a:t>
+                        <a:t>2,268</a:t>
                       </a:r>
                       <a:endParaRPr lang="en-US" sz="1300" dirty="0">
                         <a:latin typeface="Arial" charset="0"/>
@@ -3137,7 +3137,7 @@
                           <a:ea typeface="Arial" pitchFamily="34" charset="-122"/>
                           <a:cs typeface="Arial" pitchFamily="34" charset="-120"/>
                         </a:rPr>
-                        <a:t>3,720</a:t>
+                        <a:t>4,668</a:t>
                       </a:r>
                       <a:endParaRPr lang="en-US" sz="1300" dirty="0">
                         <a:latin typeface="Arial" charset="0"/>
@@ -3202,7 +3202,7 @@
                           <a:ea typeface="Arial" pitchFamily="34" charset="-122"/>
                           <a:cs typeface="Arial" pitchFamily="34" charset="-120"/>
                         </a:rPr>
-                        <a:t>AI tools, company registration (~$840), accountant, coworking in Year 3</a:t>
+                        <a:t>AI tools, registration (~$840), accountant, coworking, patent tax $300 / yr</a:t>
                       </a:r>
                       <a:endParaRPr lang="en-US" sz="1300" dirty="0">
                         <a:latin typeface="Arial" charset="0"/>
@@ -3269,7 +3269,7 @@
                           <a:ea typeface="Arial" pitchFamily="34" charset="-122"/>
                           <a:cs typeface="Arial" pitchFamily="34" charset="-120"/>
                         </a:rPr>
-                        <a:t>Tax</a:t>
+                        <a:t>Tax on profit</a:t>
                       </a:r>
                       <a:endParaRPr lang="en-US" sz="1300" dirty="0">
                         <a:latin typeface="Arial" charset="0"/>
@@ -3334,7 +3334,7 @@
                           <a:ea typeface="Arial" pitchFamily="34" charset="-122"/>
                           <a:cs typeface="Arial" pitchFamily="34" charset="-120"/>
                         </a:rPr>
-                        <a:t>35</a:t>
+                        <a:t>31</a:t>
                       </a:r>
                       <a:endParaRPr lang="en-US" sz="1300" dirty="0">
                         <a:latin typeface="Arial" charset="0"/>
@@ -3399,7 +3399,7 @@
                           <a:ea typeface="Arial" pitchFamily="34" charset="-122"/>
                           <a:cs typeface="Arial" pitchFamily="34" charset="-120"/>
                         </a:rPr>
-                        <a:t>582</a:t>
+                        <a:t>229</a:t>
                       </a:r>
                       <a:endParaRPr lang="en-US" sz="1300" dirty="0">
                         <a:latin typeface="Arial" charset="0"/>
@@ -3464,7 +3464,7 @@
                           <a:ea typeface="Arial" pitchFamily="34" charset="-122"/>
                           <a:cs typeface="Arial" pitchFamily="34" charset="-120"/>
                         </a:rPr>
-                        <a:t>5,534</a:t>
+                        <a:t>616</a:t>
                       </a:r>
                       <a:endParaRPr lang="en-US" sz="1300" dirty="0">
                         <a:latin typeface="Arial" charset="0"/>
@@ -3529,7 +3529,7 @@
                           <a:ea typeface="Arial" pitchFamily="34" charset="-122"/>
                           <a:cs typeface="Arial" pitchFamily="34" charset="-120"/>
                         </a:rPr>
-                        <a:t>1% minimum tax; 20% profit tax after earlier losses</a:t>
+                        <a:t>1% monthly prepayment; 20% profit tax only after past losses are used</a:t>
                       </a:r>
                       <a:endParaRPr lang="en-US" sz="1300" dirty="0">
                         <a:latin typeface="Arial" charset="0"/>
@@ -3664,7 +3664,7 @@
                           <a:ea typeface="Arial" pitchFamily="34" charset="-122"/>
                           <a:cs typeface="Arial" pitchFamily="34" charset="-120"/>
                         </a:rPr>
-                        <a:t>–3,799</a:t>
+                        <a:t>–8,071</a:t>
                       </a:r>
                       <a:endParaRPr lang="en-US" sz="1300" dirty="0">
                         <a:latin typeface="Arial" charset="0"/>
@@ -3732,7 +3732,7 @@
                           <a:ea typeface="Arial" pitchFamily="34" charset="-122"/>
                           <a:cs typeface="Arial" pitchFamily="34" charset="-120"/>
                         </a:rPr>
-                        <a:t>6,092</a:t>
+                        <a:t>–5,764</a:t>
                       </a:r>
                       <a:endParaRPr lang="en-US" sz="1300" dirty="0">
                         <a:latin typeface="Arial" charset="0"/>
@@ -3800,7 +3800,7 @@
                           <a:ea typeface="Arial" pitchFamily="34" charset="-122"/>
                           <a:cs typeface="Arial" pitchFamily="34" charset="-120"/>
                         </a:rPr>
-                        <a:t>22,137</a:t>
+                        <a:t>4,051</a:t>
                       </a:r>
                       <a:endParaRPr lang="en-US" sz="1300" dirty="0">
                         <a:latin typeface="Arial" charset="0"/>
@@ -4003,7 +4003,7 @@
                           <a:ea typeface="Arial" pitchFamily="34" charset="-122"/>
                           <a:cs typeface="Arial" pitchFamily="34" charset="-120"/>
                         </a:rPr>
-                        <a:t>–3,543</a:t>
+                        <a:t>–7,843</a:t>
                       </a:r>
                       <a:endParaRPr lang="en-US" sz="1300" dirty="0">
                         <a:latin typeface="Arial" charset="0"/>
@@ -4068,7 +4068,7 @@
                           <a:ea typeface="Arial" pitchFamily="34" charset="-122"/>
                           <a:cs typeface="Arial" pitchFamily="34" charset="-120"/>
                         </a:rPr>
-                        <a:t>10,563</a:t>
+                        <a:t>–789</a:t>
                       </a:r>
                       <a:endParaRPr lang="en-US" sz="1300" dirty="0">
                         <a:latin typeface="Arial" charset="0"/>
@@ -4133,7 +4133,7 @@
                           <a:ea typeface="Arial" pitchFamily="34" charset="-122"/>
                           <a:cs typeface="Arial" pitchFamily="34" charset="-120"/>
                         </a:rPr>
-                        <a:t>38,395</a:t>
+                        <a:t>19,879</a:t>
                       </a:r>
                       <a:endParaRPr lang="en-US" sz="1300" dirty="0">
                         <a:latin typeface="Arial" charset="0"/>
@@ -4284,7 +4284,7 @@
                 <a:ea typeface="Arial" pitchFamily="34" charset="-122"/>
                 <a:cs typeface="Arial" pitchFamily="34" charset="-120"/>
               </a:rPr>
-              <a:t>Break-even: about 670 paying shops at Year-3 costs (1.0% of the 65,433-store SAM). If founders earned $1,000 / month, Year 3 would still be about +$7.7K. Prices: DigitalOcean, Resend, Ministry of Commerce, checked Sept 2026. Model: docs/rentify-financial-model.xlsx.</a:t>
+              <a:t>Break-even: about 1,040 paying shops at Year-3 costs (1.6% of the 65,433-store SAM). Funding needed before profit: about $13.8K. Founders take low pay until the business grows. Tax rules and prices checked Sept 2026; confirm with an accountant. Model: docs/rentify-financial-model.xlsx.</a:t>
             </a:r>
             <a:endParaRPr lang="en-US" sz="1000" dirty="0"/>
           </a:p>

--- a/output/drafts/Rentify_v6_slide17_financial-detail.pptx
+++ b/output/drafts/Rentify_v6_slide17_financial-detail.pptx
@@ -908,7 +908,7 @@
                 <a:ea typeface="Arial" pitchFamily="34" charset="-122"/>
                 <a:cs typeface="Arial" pitchFamily="34" charset="-120"/>
               </a:rPr>
-              <a:t>Financial detail (bottom-up model)</a:t>
+              <a:t>Financial detail (bootstrapped model)</a:t>
             </a:r>
             <a:endParaRPr lang="en-US" sz="3000" dirty="0"/>
           </a:p>
@@ -943,7 +943,7 @@
                 <a:gridCol w="1188720"/>
                 <a:gridCol w="5148072"/>
               </a:tblGrid>
-              <a:tr h="457200">
+              <a:tr h="420624">
                 <a:tc>
                   <a:txBody>
                     <a:bodyPr/>
@@ -1285,7 +1285,7 @@
                   </a:tcPr>
                 </a:tc>
               </a:tr>
-              <a:tr h="457200">
+              <a:tr h="420624">
                 <a:tc>
                   <a:txBody>
                     <a:bodyPr/>
@@ -1612,7 +1612,7 @@
                   </a:tcPr>
                 </a:tc>
               </a:tr>
-              <a:tr h="457200">
+              <a:tr h="420624">
                 <a:tc>
                   <a:txBody>
                     <a:bodyPr/>
@@ -1939,7 +1939,661 @@
                   </a:tcPr>
                 </a:tc>
               </a:tr>
-              <a:tr h="457200">
+              <a:tr h="420624">
+                <a:tc>
+                  <a:txBody>
+                    <a:bodyPr/>
+                    <a:lstStyle/>
+                    <a:p>
+                      <a:pPr indent="0" marL="0">
+                        <a:buNone/>
+                      </a:pPr>
+                      <a:r>
+                        <a:rPr lang="en-US" sz="1300" dirty="0">
+                          <a:solidFill>
+                            <a:srgbClr val="15243A"/>
+                          </a:solidFill>
+                          <a:latin typeface="Arial" pitchFamily="34" charset="0"/>
+                          <a:ea typeface="Arial" pitchFamily="34" charset="-122"/>
+                          <a:cs typeface="Arial" pitchFamily="34" charset="-120"/>
+                        </a:rPr>
+                        <a:t>Sales &amp; marketing</a:t>
+                      </a:r>
+                      <a:endParaRPr lang="en-US" sz="1300" dirty="0">
+                        <a:latin typeface="Arial" charset="0"/>
+                        <a:ea typeface="Arial" charset="0"/>
+                        <a:cs typeface="Arial" charset="0"/>
+                      </a:endParaRPr>
+                    </a:p>
+                  </a:txBody>
+                  <a:tcPr marL="73152" marR="73152" marT="73152" marB="73152" anchor="ctr">
+                    <a:lnL w="9525" cap="flat" cmpd="sng" algn="ctr">
+                      <a:solidFill>
+                        <a:srgbClr val="D7E1ED"/>
+                      </a:solidFill>
+                      <a:prstDash val="solid"/>
+                      <a:round/>
+                      <a:headEnd type="none" w="med" len="med"/>
+                      <a:tailEnd type="none" w="med" len="med"/>
+                    </a:lnL>
+                    <a:lnR w="9525" cap="flat" cmpd="sng" algn="ctr">
+                      <a:solidFill>
+                        <a:srgbClr val="D7E1ED"/>
+                      </a:solidFill>
+                      <a:prstDash val="solid"/>
+                      <a:round/>
+                      <a:headEnd type="none" w="med" len="med"/>
+                      <a:tailEnd type="none" w="med" len="med"/>
+                    </a:lnR>
+                    <a:lnT w="9525" cap="flat" cmpd="sng" algn="ctr">
+                      <a:solidFill>
+                        <a:srgbClr val="D7E1ED"/>
+                      </a:solidFill>
+                      <a:prstDash val="solid"/>
+                      <a:round/>
+                      <a:headEnd type="none" w="med" len="med"/>
+                      <a:tailEnd type="none" w="med" len="med"/>
+                    </a:lnT>
+                    <a:lnB w="9525" cap="flat" cmpd="sng" algn="ctr">
+                      <a:solidFill>
+                        <a:srgbClr val="D7E1ED"/>
+                      </a:solidFill>
+                      <a:prstDash val="solid"/>
+                      <a:round/>
+                      <a:headEnd type="none" w="med" len="med"/>
+                      <a:tailEnd type="none" w="med" len="med"/>
+                    </a:lnB>
+                  </a:tcPr>
+                </a:tc>
+                <a:tc>
+                  <a:txBody>
+                    <a:bodyPr/>
+                    <a:lstStyle/>
+                    <a:p>
+                      <a:pPr algn="r" indent="0" marL="0">
+                        <a:buNone/>
+                      </a:pPr>
+                      <a:r>
+                        <a:rPr lang="en-US" sz="1300" dirty="0">
+                          <a:solidFill>
+                            <a:srgbClr val="15243A"/>
+                          </a:solidFill>
+                          <a:latin typeface="Arial" pitchFamily="34" charset="0"/>
+                          <a:ea typeface="Arial" pitchFamily="34" charset="-122"/>
+                          <a:cs typeface="Arial" pitchFamily="34" charset="-120"/>
+                        </a:rPr>
+                        <a:t>472</a:t>
+                      </a:r>
+                      <a:endParaRPr lang="en-US" sz="1300" dirty="0">
+                        <a:latin typeface="Arial" charset="0"/>
+                        <a:ea typeface="Arial" charset="0"/>
+                        <a:cs typeface="Arial" charset="0"/>
+                      </a:endParaRPr>
+                    </a:p>
+                  </a:txBody>
+                  <a:tcPr marL="73152" marR="73152" marT="73152" marB="73152" anchor="ctr">
+                    <a:lnL w="9525" cap="flat" cmpd="sng" algn="ctr">
+                      <a:solidFill>
+                        <a:srgbClr val="D7E1ED"/>
+                      </a:solidFill>
+                      <a:prstDash val="solid"/>
+                      <a:round/>
+                      <a:headEnd type="none" w="med" len="med"/>
+                      <a:tailEnd type="none" w="med" len="med"/>
+                    </a:lnL>
+                    <a:lnR w="9525" cap="flat" cmpd="sng" algn="ctr">
+                      <a:solidFill>
+                        <a:srgbClr val="D7E1ED"/>
+                      </a:solidFill>
+                      <a:prstDash val="solid"/>
+                      <a:round/>
+                      <a:headEnd type="none" w="med" len="med"/>
+                      <a:tailEnd type="none" w="med" len="med"/>
+                    </a:lnR>
+                    <a:lnT w="9525" cap="flat" cmpd="sng" algn="ctr">
+                      <a:solidFill>
+                        <a:srgbClr val="D7E1ED"/>
+                      </a:solidFill>
+                      <a:prstDash val="solid"/>
+                      <a:round/>
+                      <a:headEnd type="none" w="med" len="med"/>
+                      <a:tailEnd type="none" w="med" len="med"/>
+                    </a:lnT>
+                    <a:lnB w="9525" cap="flat" cmpd="sng" algn="ctr">
+                      <a:solidFill>
+                        <a:srgbClr val="D7E1ED"/>
+                      </a:solidFill>
+                      <a:prstDash val="solid"/>
+                      <a:round/>
+                      <a:headEnd type="none" w="med" len="med"/>
+                      <a:tailEnd type="none" w="med" len="med"/>
+                    </a:lnB>
+                  </a:tcPr>
+                </a:tc>
+                <a:tc>
+                  <a:txBody>
+                    <a:bodyPr/>
+                    <a:lstStyle/>
+                    <a:p>
+                      <a:pPr algn="r" indent="0" marL="0">
+                        <a:buNone/>
+                      </a:pPr>
+                      <a:r>
+                        <a:rPr lang="en-US" sz="1300" dirty="0">
+                          <a:solidFill>
+                            <a:srgbClr val="15243A"/>
+                          </a:solidFill>
+                          <a:latin typeface="Arial" pitchFamily="34" charset="0"/>
+                          <a:ea typeface="Arial" pitchFamily="34" charset="-122"/>
+                          <a:cs typeface="Arial" pitchFamily="34" charset="-120"/>
+                        </a:rPr>
+                        <a:t>2,646</a:t>
+                      </a:r>
+                      <a:endParaRPr lang="en-US" sz="1300" dirty="0">
+                        <a:latin typeface="Arial" charset="0"/>
+                        <a:ea typeface="Arial" charset="0"/>
+                        <a:cs typeface="Arial" charset="0"/>
+                      </a:endParaRPr>
+                    </a:p>
+                  </a:txBody>
+                  <a:tcPr marL="73152" marR="73152" marT="73152" marB="73152" anchor="ctr">
+                    <a:lnL w="9525" cap="flat" cmpd="sng" algn="ctr">
+                      <a:solidFill>
+                        <a:srgbClr val="D7E1ED"/>
+                      </a:solidFill>
+                      <a:prstDash val="solid"/>
+                      <a:round/>
+                      <a:headEnd type="none" w="med" len="med"/>
+                      <a:tailEnd type="none" w="med" len="med"/>
+                    </a:lnL>
+                    <a:lnR w="9525" cap="flat" cmpd="sng" algn="ctr">
+                      <a:solidFill>
+                        <a:srgbClr val="D7E1ED"/>
+                      </a:solidFill>
+                      <a:prstDash val="solid"/>
+                      <a:round/>
+                      <a:headEnd type="none" w="med" len="med"/>
+                      <a:tailEnd type="none" w="med" len="med"/>
+                    </a:lnR>
+                    <a:lnT w="9525" cap="flat" cmpd="sng" algn="ctr">
+                      <a:solidFill>
+                        <a:srgbClr val="D7E1ED"/>
+                      </a:solidFill>
+                      <a:prstDash val="solid"/>
+                      <a:round/>
+                      <a:headEnd type="none" w="med" len="med"/>
+                      <a:tailEnd type="none" w="med" len="med"/>
+                    </a:lnT>
+                    <a:lnB w="9525" cap="flat" cmpd="sng" algn="ctr">
+                      <a:solidFill>
+                        <a:srgbClr val="D7E1ED"/>
+                      </a:solidFill>
+                      <a:prstDash val="solid"/>
+                      <a:round/>
+                      <a:headEnd type="none" w="med" len="med"/>
+                      <a:tailEnd type="none" w="med" len="med"/>
+                    </a:lnB>
+                  </a:tcPr>
+                </a:tc>
+                <a:tc>
+                  <a:txBody>
+                    <a:bodyPr/>
+                    <a:lstStyle/>
+                    <a:p>
+                      <a:pPr algn="r" indent="0" marL="0">
+                        <a:buNone/>
+                      </a:pPr>
+                      <a:r>
+                        <a:rPr lang="en-US" sz="1300" dirty="0">
+                          <a:solidFill>
+                            <a:srgbClr val="15243A"/>
+                          </a:solidFill>
+                          <a:latin typeface="Arial" pitchFamily="34" charset="0"/>
+                          <a:ea typeface="Arial" pitchFamily="34" charset="-122"/>
+                          <a:cs typeface="Arial" pitchFamily="34" charset="-120"/>
+                        </a:rPr>
+                        <a:t>6,869</a:t>
+                      </a:r>
+                      <a:endParaRPr lang="en-US" sz="1300" dirty="0">
+                        <a:latin typeface="Arial" charset="0"/>
+                        <a:ea typeface="Arial" charset="0"/>
+                        <a:cs typeface="Arial" charset="0"/>
+                      </a:endParaRPr>
+                    </a:p>
+                  </a:txBody>
+                  <a:tcPr marL="73152" marR="73152" marT="73152" marB="73152" anchor="ctr">
+                    <a:lnL w="9525" cap="flat" cmpd="sng" algn="ctr">
+                      <a:solidFill>
+                        <a:srgbClr val="D7E1ED"/>
+                      </a:solidFill>
+                      <a:prstDash val="solid"/>
+                      <a:round/>
+                      <a:headEnd type="none" w="med" len="med"/>
+                      <a:tailEnd type="none" w="med" len="med"/>
+                    </a:lnL>
+                    <a:lnR w="9525" cap="flat" cmpd="sng" algn="ctr">
+                      <a:solidFill>
+                        <a:srgbClr val="D7E1ED"/>
+                      </a:solidFill>
+                      <a:prstDash val="solid"/>
+                      <a:round/>
+                      <a:headEnd type="none" w="med" len="med"/>
+                      <a:tailEnd type="none" w="med" len="med"/>
+                    </a:lnR>
+                    <a:lnT w="9525" cap="flat" cmpd="sng" algn="ctr">
+                      <a:solidFill>
+                        <a:srgbClr val="D7E1ED"/>
+                      </a:solidFill>
+                      <a:prstDash val="solid"/>
+                      <a:round/>
+                      <a:headEnd type="none" w="med" len="med"/>
+                      <a:tailEnd type="none" w="med" len="med"/>
+                    </a:lnT>
+                    <a:lnB w="9525" cap="flat" cmpd="sng" algn="ctr">
+                      <a:solidFill>
+                        <a:srgbClr val="D7E1ED"/>
+                      </a:solidFill>
+                      <a:prstDash val="solid"/>
+                      <a:round/>
+                      <a:headEnd type="none" w="med" len="med"/>
+                      <a:tailEnd type="none" w="med" len="med"/>
+                    </a:lnB>
+                  </a:tcPr>
+                </a:tc>
+                <a:tc>
+                  <a:txBody>
+                    <a:bodyPr/>
+                    <a:lstStyle/>
+                    <a:p>
+                      <a:pPr indent="0" marL="0">
+                        <a:buNone/>
+                      </a:pPr>
+                      <a:r>
+                        <a:rPr lang="en-US" sz="1300" dirty="0">
+                          <a:solidFill>
+                            <a:srgbClr val="15243A"/>
+                          </a:solidFill>
+                          <a:latin typeface="Arial" pitchFamily="34" charset="0"/>
+                          <a:ea typeface="Arial" pitchFamily="34" charset="-122"/>
+                          <a:cs typeface="Arial" pitchFamily="34" charset="-120"/>
+                        </a:rPr>
+                        <a:t>10% of revenue + referral credits; growth is founder-led</a:t>
+                      </a:r>
+                      <a:endParaRPr lang="en-US" sz="1300" dirty="0">
+                        <a:latin typeface="Arial" charset="0"/>
+                        <a:ea typeface="Arial" charset="0"/>
+                        <a:cs typeface="Arial" charset="0"/>
+                      </a:endParaRPr>
+                    </a:p>
+                  </a:txBody>
+                  <a:tcPr marL="73152" marR="73152" marT="73152" marB="73152" anchor="ctr">
+                    <a:lnL w="9525" cap="flat" cmpd="sng" algn="ctr">
+                      <a:solidFill>
+                        <a:srgbClr val="D7E1ED"/>
+                      </a:solidFill>
+                      <a:prstDash val="solid"/>
+                      <a:round/>
+                      <a:headEnd type="none" w="med" len="med"/>
+                      <a:tailEnd type="none" w="med" len="med"/>
+                    </a:lnL>
+                    <a:lnR w="9525" cap="flat" cmpd="sng" algn="ctr">
+                      <a:solidFill>
+                        <a:srgbClr val="D7E1ED"/>
+                      </a:solidFill>
+                      <a:prstDash val="solid"/>
+                      <a:round/>
+                      <a:headEnd type="none" w="med" len="med"/>
+                      <a:tailEnd type="none" w="med" len="med"/>
+                    </a:lnR>
+                    <a:lnT w="9525" cap="flat" cmpd="sng" algn="ctr">
+                      <a:solidFill>
+                        <a:srgbClr val="D7E1ED"/>
+                      </a:solidFill>
+                      <a:prstDash val="solid"/>
+                      <a:round/>
+                      <a:headEnd type="none" w="med" len="med"/>
+                      <a:tailEnd type="none" w="med" len="med"/>
+                    </a:lnT>
+                    <a:lnB w="9525" cap="flat" cmpd="sng" algn="ctr">
+                      <a:solidFill>
+                        <a:srgbClr val="D7E1ED"/>
+                      </a:solidFill>
+                      <a:prstDash val="solid"/>
+                      <a:round/>
+                      <a:headEnd type="none" w="med" len="med"/>
+                      <a:tailEnd type="none" w="med" len="med"/>
+                    </a:lnB>
+                  </a:tcPr>
+                </a:tc>
+              </a:tr>
+              <a:tr h="420624">
+                <a:tc>
+                  <a:txBody>
+                    <a:bodyPr/>
+                    <a:lstStyle/>
+                    <a:p>
+                      <a:pPr indent="0" marL="0">
+                        <a:buNone/>
+                      </a:pPr>
+                      <a:r>
+                        <a:rPr lang="en-US" sz="1300" dirty="0">
+                          <a:solidFill>
+                            <a:srgbClr val="15243A"/>
+                          </a:solidFill>
+                          <a:latin typeface="Arial" pitchFamily="34" charset="0"/>
+                          <a:ea typeface="Arial" pitchFamily="34" charset="-122"/>
+                          <a:cs typeface="Arial" pitchFamily="34" charset="-120"/>
+                        </a:rPr>
+                        <a:t>Software, office, legal</a:t>
+                      </a:r>
+                      <a:endParaRPr lang="en-US" sz="1300" dirty="0">
+                        <a:latin typeface="Arial" charset="0"/>
+                        <a:ea typeface="Arial" charset="0"/>
+                        <a:cs typeface="Arial" charset="0"/>
+                      </a:endParaRPr>
+                    </a:p>
+                  </a:txBody>
+                  <a:tcPr marL="73152" marR="73152" marT="73152" marB="73152" anchor="ctr">
+                    <a:lnL w="9525" cap="flat" cmpd="sng" algn="ctr">
+                      <a:solidFill>
+                        <a:srgbClr val="D7E1ED"/>
+                      </a:solidFill>
+                      <a:prstDash val="solid"/>
+                      <a:round/>
+                      <a:headEnd type="none" w="med" len="med"/>
+                      <a:tailEnd type="none" w="med" len="med"/>
+                    </a:lnL>
+                    <a:lnR w="9525" cap="flat" cmpd="sng" algn="ctr">
+                      <a:solidFill>
+                        <a:srgbClr val="D7E1ED"/>
+                      </a:solidFill>
+                      <a:prstDash val="solid"/>
+                      <a:round/>
+                      <a:headEnd type="none" w="med" len="med"/>
+                      <a:tailEnd type="none" w="med" len="med"/>
+                    </a:lnR>
+                    <a:lnT w="9525" cap="flat" cmpd="sng" algn="ctr">
+                      <a:solidFill>
+                        <a:srgbClr val="D7E1ED"/>
+                      </a:solidFill>
+                      <a:prstDash val="solid"/>
+                      <a:round/>
+                      <a:headEnd type="none" w="med" len="med"/>
+                      <a:tailEnd type="none" w="med" len="med"/>
+                    </a:lnT>
+                    <a:lnB w="9525" cap="flat" cmpd="sng" algn="ctr">
+                      <a:solidFill>
+                        <a:srgbClr val="D7E1ED"/>
+                      </a:solidFill>
+                      <a:prstDash val="solid"/>
+                      <a:round/>
+                      <a:headEnd type="none" w="med" len="med"/>
+                      <a:tailEnd type="none" w="med" len="med"/>
+                    </a:lnB>
+                  </a:tcPr>
+                </a:tc>
+                <a:tc>
+                  <a:txBody>
+                    <a:bodyPr/>
+                    <a:lstStyle/>
+                    <a:p>
+                      <a:pPr algn="r" indent="0" marL="0">
+                        <a:buNone/>
+                      </a:pPr>
+                      <a:r>
+                        <a:rPr lang="en-US" sz="1300" dirty="0">
+                          <a:solidFill>
+                            <a:srgbClr val="15243A"/>
+                          </a:solidFill>
+                          <a:latin typeface="Arial" pitchFamily="34" charset="0"/>
+                          <a:ea typeface="Arial" pitchFamily="34" charset="-122"/>
+                          <a:cs typeface="Arial" pitchFamily="34" charset="-120"/>
+                        </a:rPr>
+                        <a:t>1,687</a:t>
+                      </a:r>
+                      <a:endParaRPr lang="en-US" sz="1300" dirty="0">
+                        <a:latin typeface="Arial" charset="0"/>
+                        <a:ea typeface="Arial" charset="0"/>
+                        <a:cs typeface="Arial" charset="0"/>
+                      </a:endParaRPr>
+                    </a:p>
+                  </a:txBody>
+                  <a:tcPr marL="73152" marR="73152" marT="73152" marB="73152" anchor="ctr">
+                    <a:lnL w="9525" cap="flat" cmpd="sng" algn="ctr">
+                      <a:solidFill>
+                        <a:srgbClr val="D7E1ED"/>
+                      </a:solidFill>
+                      <a:prstDash val="solid"/>
+                      <a:round/>
+                      <a:headEnd type="none" w="med" len="med"/>
+                      <a:tailEnd type="none" w="med" len="med"/>
+                    </a:lnL>
+                    <a:lnR w="9525" cap="flat" cmpd="sng" algn="ctr">
+                      <a:solidFill>
+                        <a:srgbClr val="D7E1ED"/>
+                      </a:solidFill>
+                      <a:prstDash val="solid"/>
+                      <a:round/>
+                      <a:headEnd type="none" w="med" len="med"/>
+                      <a:tailEnd type="none" w="med" len="med"/>
+                    </a:lnR>
+                    <a:lnT w="9525" cap="flat" cmpd="sng" algn="ctr">
+                      <a:solidFill>
+                        <a:srgbClr val="D7E1ED"/>
+                      </a:solidFill>
+                      <a:prstDash val="solid"/>
+                      <a:round/>
+                      <a:headEnd type="none" w="med" len="med"/>
+                      <a:tailEnd type="none" w="med" len="med"/>
+                    </a:lnT>
+                    <a:lnB w="9525" cap="flat" cmpd="sng" algn="ctr">
+                      <a:solidFill>
+                        <a:srgbClr val="D7E1ED"/>
+                      </a:solidFill>
+                      <a:prstDash val="solid"/>
+                      <a:round/>
+                      <a:headEnd type="none" w="med" len="med"/>
+                      <a:tailEnd type="none" w="med" len="med"/>
+                    </a:lnB>
+                  </a:tcPr>
+                </a:tc>
+                <a:tc>
+                  <a:txBody>
+                    <a:bodyPr/>
+                    <a:lstStyle/>
+                    <a:p>
+                      <a:pPr algn="r" indent="0" marL="0">
+                        <a:buNone/>
+                      </a:pPr>
+                      <a:r>
+                        <a:rPr lang="en-US" sz="1300" dirty="0">
+                          <a:solidFill>
+                            <a:srgbClr val="15243A"/>
+                          </a:solidFill>
+                          <a:latin typeface="Arial" pitchFamily="34" charset="0"/>
+                          <a:ea typeface="Arial" pitchFamily="34" charset="-122"/>
+                          <a:cs typeface="Arial" pitchFamily="34" charset="-120"/>
+                        </a:rPr>
+                        <a:t>847</a:t>
+                      </a:r>
+                      <a:endParaRPr lang="en-US" sz="1300" dirty="0">
+                        <a:latin typeface="Arial" charset="0"/>
+                        <a:ea typeface="Arial" charset="0"/>
+                        <a:cs typeface="Arial" charset="0"/>
+                      </a:endParaRPr>
+                    </a:p>
+                  </a:txBody>
+                  <a:tcPr marL="73152" marR="73152" marT="73152" marB="73152" anchor="ctr">
+                    <a:lnL w="9525" cap="flat" cmpd="sng" algn="ctr">
+                      <a:solidFill>
+                        <a:srgbClr val="D7E1ED"/>
+                      </a:solidFill>
+                      <a:prstDash val="solid"/>
+                      <a:round/>
+                      <a:headEnd type="none" w="med" len="med"/>
+                      <a:tailEnd type="none" w="med" len="med"/>
+                    </a:lnL>
+                    <a:lnR w="9525" cap="flat" cmpd="sng" algn="ctr">
+                      <a:solidFill>
+                        <a:srgbClr val="D7E1ED"/>
+                      </a:solidFill>
+                      <a:prstDash val="solid"/>
+                      <a:round/>
+                      <a:headEnd type="none" w="med" len="med"/>
+                      <a:tailEnd type="none" w="med" len="med"/>
+                    </a:lnR>
+                    <a:lnT w="9525" cap="flat" cmpd="sng" algn="ctr">
+                      <a:solidFill>
+                        <a:srgbClr val="D7E1ED"/>
+                      </a:solidFill>
+                      <a:prstDash val="solid"/>
+                      <a:round/>
+                      <a:headEnd type="none" w="med" len="med"/>
+                      <a:tailEnd type="none" w="med" len="med"/>
+                    </a:lnT>
+                    <a:lnB w="9525" cap="flat" cmpd="sng" algn="ctr">
+                      <a:solidFill>
+                        <a:srgbClr val="D7E1ED"/>
+                      </a:solidFill>
+                      <a:prstDash val="solid"/>
+                      <a:round/>
+                      <a:headEnd type="none" w="med" len="med"/>
+                      <a:tailEnd type="none" w="med" len="med"/>
+                    </a:lnB>
+                  </a:tcPr>
+                </a:tc>
+                <a:tc>
+                  <a:txBody>
+                    <a:bodyPr/>
+                    <a:lstStyle/>
+                    <a:p>
+                      <a:pPr algn="r" indent="0" marL="0">
+                        <a:buNone/>
+                      </a:pPr>
+                      <a:r>
+                        <a:rPr lang="en-US" sz="1300" dirty="0">
+                          <a:solidFill>
+                            <a:srgbClr val="15243A"/>
+                          </a:solidFill>
+                          <a:latin typeface="Arial" pitchFamily="34" charset="0"/>
+                          <a:ea typeface="Arial" pitchFamily="34" charset="-122"/>
+                          <a:cs typeface="Arial" pitchFamily="34" charset="-120"/>
+                        </a:rPr>
+                        <a:t>1,721</a:t>
+                      </a:r>
+                      <a:endParaRPr lang="en-US" sz="1300" dirty="0">
+                        <a:latin typeface="Arial" charset="0"/>
+                        <a:ea typeface="Arial" charset="0"/>
+                        <a:cs typeface="Arial" charset="0"/>
+                      </a:endParaRPr>
+                    </a:p>
+                  </a:txBody>
+                  <a:tcPr marL="73152" marR="73152" marT="73152" marB="73152" anchor="ctr">
+                    <a:lnL w="9525" cap="flat" cmpd="sng" algn="ctr">
+                      <a:solidFill>
+                        <a:srgbClr val="D7E1ED"/>
+                      </a:solidFill>
+                      <a:prstDash val="solid"/>
+                      <a:round/>
+                      <a:headEnd type="none" w="med" len="med"/>
+                      <a:tailEnd type="none" w="med" len="med"/>
+                    </a:lnL>
+                    <a:lnR w="9525" cap="flat" cmpd="sng" algn="ctr">
+                      <a:solidFill>
+                        <a:srgbClr val="D7E1ED"/>
+                      </a:solidFill>
+                      <a:prstDash val="solid"/>
+                      <a:round/>
+                      <a:headEnd type="none" w="med" len="med"/>
+                      <a:tailEnd type="none" w="med" len="med"/>
+                    </a:lnR>
+                    <a:lnT w="9525" cap="flat" cmpd="sng" algn="ctr">
+                      <a:solidFill>
+                        <a:srgbClr val="D7E1ED"/>
+                      </a:solidFill>
+                      <a:prstDash val="solid"/>
+                      <a:round/>
+                      <a:headEnd type="none" w="med" len="med"/>
+                      <a:tailEnd type="none" w="med" len="med"/>
+                    </a:lnT>
+                    <a:lnB w="9525" cap="flat" cmpd="sng" algn="ctr">
+                      <a:solidFill>
+                        <a:srgbClr val="D7E1ED"/>
+                      </a:solidFill>
+                      <a:prstDash val="solid"/>
+                      <a:round/>
+                      <a:headEnd type="none" w="med" len="med"/>
+                      <a:tailEnd type="none" w="med" len="med"/>
+                    </a:lnB>
+                  </a:tcPr>
+                </a:tc>
+                <a:tc>
+                  <a:txBody>
+                    <a:bodyPr/>
+                    <a:lstStyle/>
+                    <a:p>
+                      <a:pPr indent="0" marL="0">
+                        <a:buNone/>
+                      </a:pPr>
+                      <a:r>
+                        <a:rPr lang="en-US" sz="1300" dirty="0">
+                          <a:solidFill>
+                            <a:srgbClr val="15243A"/>
+                          </a:solidFill>
+                          <a:latin typeface="Arial" pitchFamily="34" charset="0"/>
+                          <a:ea typeface="Arial" pitchFamily="34" charset="-122"/>
+                          <a:cs typeface="Arial" pitchFamily="34" charset="-120"/>
+                        </a:rPr>
+                        <a:t>Shared AI tools, registration (~$840), patent tax; no office rent</a:t>
+                      </a:r>
+                      <a:endParaRPr lang="en-US" sz="1300" dirty="0">
+                        <a:latin typeface="Arial" charset="0"/>
+                        <a:ea typeface="Arial" charset="0"/>
+                        <a:cs typeface="Arial" charset="0"/>
+                      </a:endParaRPr>
+                    </a:p>
+                  </a:txBody>
+                  <a:tcPr marL="73152" marR="73152" marT="73152" marB="73152" anchor="ctr">
+                    <a:lnL w="9525" cap="flat" cmpd="sng" algn="ctr">
+                      <a:solidFill>
+                        <a:srgbClr val="D7E1ED"/>
+                      </a:solidFill>
+                      <a:prstDash val="solid"/>
+                      <a:round/>
+                      <a:headEnd type="none" w="med" len="med"/>
+                      <a:tailEnd type="none" w="med" len="med"/>
+                    </a:lnL>
+                    <a:lnR w="9525" cap="flat" cmpd="sng" algn="ctr">
+                      <a:solidFill>
+                        <a:srgbClr val="D7E1ED"/>
+                      </a:solidFill>
+                      <a:prstDash val="solid"/>
+                      <a:round/>
+                      <a:headEnd type="none" w="med" len="med"/>
+                      <a:tailEnd type="none" w="med" len="med"/>
+                    </a:lnR>
+                    <a:lnT w="9525" cap="flat" cmpd="sng" algn="ctr">
+                      <a:solidFill>
+                        <a:srgbClr val="D7E1ED"/>
+                      </a:solidFill>
+                      <a:prstDash val="solid"/>
+                      <a:round/>
+                      <a:headEnd type="none" w="med" len="med"/>
+                      <a:tailEnd type="none" w="med" len="med"/>
+                    </a:lnT>
+                    <a:lnB w="9525" cap="flat" cmpd="sng" algn="ctr">
+                      <a:solidFill>
+                        <a:srgbClr val="D7E1ED"/>
+                      </a:solidFill>
+                      <a:prstDash val="solid"/>
+                      <a:round/>
+                      <a:headEnd type="none" w="med" len="med"/>
+                      <a:tailEnd type="none" w="med" len="med"/>
+                    </a:lnB>
+                  </a:tcPr>
+                </a:tc>
+              </a:tr>
+              <a:tr h="420624">
                 <a:tc>
                   <a:txBody>
                     <a:bodyPr/>
@@ -1957,7 +2611,7 @@
                           <a:ea typeface="Arial" pitchFamily="34" charset="-122"/>
                           <a:cs typeface="Arial" pitchFamily="34" charset="-120"/>
                         </a:rPr>
-                        <a:t>Gross profit</a:t>
+                        <a:t>Profit before team pay</a:t>
                       </a:r>
                       <a:endParaRPr lang="en-US" sz="1300" dirty="0">
                         <a:latin typeface="Arial" charset="0"/>
@@ -2025,7 +2679,7 @@
                           <a:ea typeface="Arial" pitchFamily="34" charset="-122"/>
                           <a:cs typeface="Arial" pitchFamily="34" charset="-120"/>
                         </a:rPr>
-                        <a:t>2,454</a:t>
+                        <a:t>295</a:t>
                       </a:r>
                       <a:endParaRPr lang="en-US" sz="1300" dirty="0">
                         <a:latin typeface="Arial" charset="0"/>
@@ -2093,7 +2747,7 @@
                           <a:ea typeface="Arial" pitchFamily="34" charset="-122"/>
                           <a:cs typeface="Arial" pitchFamily="34" charset="-120"/>
                         </a:rPr>
-                        <a:t>21,277</a:t>
+                        <a:t>17,784</a:t>
                       </a:r>
                       <a:endParaRPr lang="en-US" sz="1300" dirty="0">
                         <a:latin typeface="Arial" charset="0"/>
@@ -2161,7 +2815,7 @@
                           <a:ea typeface="Arial" pitchFamily="34" charset="-122"/>
                           <a:cs typeface="Arial" pitchFamily="34" charset="-120"/>
                         </a:rPr>
-                        <a:t>58,573</a:t>
+                        <a:t>49,983</a:t>
                       </a:r>
                       <a:endParaRPr lang="en-US" sz="1300" dirty="0">
                         <a:latin typeface="Arial" charset="0"/>
@@ -2220,6 +2874,17 @@
                       <a:pPr indent="0" marL="0">
                         <a:buNone/>
                       </a:pPr>
+                      <a:r>
+                        <a:rPr lang="en-US" sz="1300" dirty="0">
+                          <a:solidFill>
+                            <a:srgbClr val="15243A"/>
+                          </a:solidFill>
+                          <a:latin typeface="Arial" pitchFamily="34" charset="0"/>
+                          <a:ea typeface="Arial" pitchFamily="34" charset="-122"/>
+                          <a:cs typeface="Arial" pitchFamily="34" charset="-120"/>
+                        </a:rPr>
+                        <a:t>Team works for equity until this is positive</a:t>
+                      </a:r>
                       <a:endParaRPr lang="en-US" sz="1300" dirty="0">
                         <a:latin typeface="Arial" charset="0"/>
                         <a:ea typeface="Arial" charset="0"/>
@@ -2270,7 +2935,7 @@
                   </a:tcPr>
                 </a:tc>
               </a:tr>
-              <a:tr h="457200">
+              <a:tr h="420624">
                 <a:tc>
                   <a:txBody>
                     <a:bodyPr/>
@@ -2288,7 +2953,7 @@
                           <a:ea typeface="Arial" pitchFamily="34" charset="-122"/>
                           <a:cs typeface="Arial" pitchFamily="34" charset="-120"/>
                         </a:rPr>
-                        <a:t>Team</a:t>
+                        <a:t>Team pay (incl. NSSF)</a:t>
                       </a:r>
                       <a:endParaRPr lang="en-US" sz="1300" dirty="0">
                         <a:latin typeface="Arial" charset="0"/>
@@ -2353,7 +3018,7 @@
                           <a:ea typeface="Arial" pitchFamily="34" charset="-122"/>
                           <a:cs typeface="Arial" pitchFamily="34" charset="-120"/>
                         </a:rPr>
-                        <a:t>6,360</a:t>
+                        <a:t>0</a:t>
                       </a:r>
                       <a:endParaRPr lang="en-US" sz="1300" dirty="0">
                         <a:latin typeface="Arial" charset="0"/>
@@ -2418,7 +3083,7 @@
                           <a:ea typeface="Arial" pitchFamily="34" charset="-122"/>
                           <a:cs typeface="Arial" pitchFamily="34" charset="-120"/>
                         </a:rPr>
-                        <a:t>19,080</a:t>
+                        <a:t>9,426</a:t>
                       </a:r>
                       <a:endParaRPr lang="en-US" sz="1300" dirty="0">
                         <a:latin typeface="Arial" charset="0"/>
@@ -2483,7 +3148,7 @@
                           <a:ea typeface="Arial" pitchFamily="34" charset="-122"/>
                           <a:cs typeface="Arial" pitchFamily="34" charset="-120"/>
                         </a:rPr>
-                        <a:t>38,520</a:t>
+                        <a:t>26,741</a:t>
                       </a:r>
                       <a:endParaRPr lang="en-US" sz="1300" dirty="0">
                         <a:latin typeface="Arial" charset="0"/>
@@ -2548,7 +3213,7 @@
                           <a:ea typeface="Arial" pitchFamily="34" charset="-122"/>
                           <a:cs typeface="Arial" pitchFamily="34" charset="-120"/>
                         </a:rPr>
-                        <a:t>5 founders on equity, $100 → $500 / month allowance; support hire in Year 3; NSSF</a:t>
+                        <a:t>Unpaid in Year 1; then half of profit, max $500 / founder / month</a:t>
                       </a:r>
                       <a:endParaRPr lang="en-US" sz="1300" dirty="0">
                         <a:latin typeface="Arial" charset="0"/>
@@ -2597,7 +3262,7 @@
                   </a:tcPr>
                 </a:tc>
               </a:tr>
-              <a:tr h="457200">
+              <a:tr h="420624">
                 <a:tc>
                   <a:txBody>
                     <a:bodyPr/>
@@ -2615,7 +3280,7 @@
                           <a:ea typeface="Arial" pitchFamily="34" charset="-122"/>
                           <a:cs typeface="Arial" pitchFamily="34" charset="-120"/>
                         </a:rPr>
-                        <a:t>Sales &amp; marketing</a:t>
+                        <a:t>Tax on profit</a:t>
                       </a:r>
                       <a:endParaRPr lang="en-US" sz="1300" dirty="0">
                         <a:latin typeface="Arial" charset="0"/>
@@ -2680,7 +3345,7 @@
                           <a:ea typeface="Arial" pitchFamily="34" charset="-122"/>
                           <a:cs typeface="Arial" pitchFamily="34" charset="-120"/>
                         </a:rPr>
-                        <a:t>1,626</a:t>
+                        <a:t>59</a:t>
                       </a:r>
                       <a:endParaRPr lang="en-US" sz="1300" dirty="0">
                         <a:latin typeface="Arial" charset="0"/>
@@ -2745,7 +3410,7 @@
                           <a:ea typeface="Arial" pitchFamily="34" charset="-122"/>
                           <a:cs typeface="Arial" pitchFamily="34" charset="-120"/>
                         </a:rPr>
-                        <a:t>5,465</a:t>
+                        <a:t>1,672</a:t>
                       </a:r>
                       <a:endParaRPr lang="en-US" sz="1300" dirty="0">
                         <a:latin typeface="Arial" charset="0"/>
@@ -2810,7 +3475,7 @@
                           <a:ea typeface="Arial" pitchFamily="34" charset="-122"/>
                           <a:cs typeface="Arial" pitchFamily="34" charset="-120"/>
                         </a:rPr>
-                        <a:t>10,718</a:t>
+                        <a:t>4,648</a:t>
                       </a:r>
                       <a:endParaRPr lang="en-US" sz="1300" dirty="0">
                         <a:latin typeface="Arial" charset="0"/>
@@ -2875,7 +3540,7 @@
                           <a:ea typeface="Arial" pitchFamily="34" charset="-122"/>
                           <a:cs typeface="Arial" pitchFamily="34" charset="-120"/>
                         </a:rPr>
-                        <a:t>Facebook ads $100 → $600 / month, QR stands, festival campaigns, referral credit</a:t>
+                        <a:t>1% monthly prepayment; 20% profit tax</a:t>
                       </a:r>
                       <a:endParaRPr lang="en-US" sz="1300" dirty="0">
                         <a:latin typeface="Arial" charset="0"/>
@@ -2924,17 +3589,17 @@
                   </a:tcPr>
                 </a:tc>
               </a:tr>
-              <a:tr h="457200">
-                <a:tc>
-                  <a:txBody>
-                    <a:bodyPr/>
-                    <a:lstStyle/>
-                    <a:p>
-                      <a:pPr indent="0" marL="0">
-                        <a:buNone/>
-                      </a:pPr>
-                      <a:r>
-                        <a:rPr lang="en-US" sz="1300" dirty="0">
+              <a:tr h="420624">
+                <a:tc>
+                  <a:txBody>
+                    <a:bodyPr/>
+                    <a:lstStyle/>
+                    <a:p>
+                      <a:pPr algn="l" indent="0" marL="0">
+                        <a:buNone/>
+                      </a:pPr>
+                      <a:r>
+                        <a:rPr lang="en-US" sz="1300" b="1" dirty="0">
                           <a:solidFill>
                             <a:srgbClr val="15243A"/>
                           </a:solidFill>
@@ -2942,661 +3607,7 @@
                           <a:ea typeface="Arial" pitchFamily="34" charset="-122"/>
                           <a:cs typeface="Arial" pitchFamily="34" charset="-120"/>
                         </a:rPr>
-                        <a:t>Software, office, legal</a:t>
-                      </a:r>
-                      <a:endParaRPr lang="en-US" sz="1300" dirty="0">
-                        <a:latin typeface="Arial" charset="0"/>
-                        <a:ea typeface="Arial" charset="0"/>
-                        <a:cs typeface="Arial" charset="0"/>
-                      </a:endParaRPr>
-                    </a:p>
-                  </a:txBody>
-                  <a:tcPr marL="73152" marR="73152" marT="73152" marB="73152" anchor="ctr">
-                    <a:lnL w="9525" cap="flat" cmpd="sng" algn="ctr">
-                      <a:solidFill>
-                        <a:srgbClr val="D7E1ED"/>
-                      </a:solidFill>
-                      <a:prstDash val="solid"/>
-                      <a:round/>
-                      <a:headEnd type="none" w="med" len="med"/>
-                      <a:tailEnd type="none" w="med" len="med"/>
-                    </a:lnL>
-                    <a:lnR w="9525" cap="flat" cmpd="sng" algn="ctr">
-                      <a:solidFill>
-                        <a:srgbClr val="D7E1ED"/>
-                      </a:solidFill>
-                      <a:prstDash val="solid"/>
-                      <a:round/>
-                      <a:headEnd type="none" w="med" len="med"/>
-                      <a:tailEnd type="none" w="med" len="med"/>
-                    </a:lnR>
-                    <a:lnT w="9525" cap="flat" cmpd="sng" algn="ctr">
-                      <a:solidFill>
-                        <a:srgbClr val="D7E1ED"/>
-                      </a:solidFill>
-                      <a:prstDash val="solid"/>
-                      <a:round/>
-                      <a:headEnd type="none" w="med" len="med"/>
-                      <a:tailEnd type="none" w="med" len="med"/>
-                    </a:lnT>
-                    <a:lnB w="9525" cap="flat" cmpd="sng" algn="ctr">
-                      <a:solidFill>
-                        <a:srgbClr val="D7E1ED"/>
-                      </a:solidFill>
-                      <a:prstDash val="solid"/>
-                      <a:round/>
-                      <a:headEnd type="none" w="med" len="med"/>
-                      <a:tailEnd type="none" w="med" len="med"/>
-                    </a:lnB>
-                  </a:tcPr>
-                </a:tc>
-                <a:tc>
-                  <a:txBody>
-                    <a:bodyPr/>
-                    <a:lstStyle/>
-                    <a:p>
-                      <a:pPr algn="r" indent="0" marL="0">
-                        <a:buNone/>
-                      </a:pPr>
-                      <a:r>
-                        <a:rPr lang="en-US" sz="1300" dirty="0">
-                          <a:solidFill>
-                            <a:srgbClr val="15243A"/>
-                          </a:solidFill>
-                          <a:latin typeface="Arial" pitchFamily="34" charset="0"/>
-                          <a:ea typeface="Arial" pitchFamily="34" charset="-122"/>
-                          <a:cs typeface="Arial" pitchFamily="34" charset="-120"/>
-                        </a:rPr>
-                        <a:t>2,508</a:t>
-                      </a:r>
-                      <a:endParaRPr lang="en-US" sz="1300" dirty="0">
-                        <a:latin typeface="Arial" charset="0"/>
-                        <a:ea typeface="Arial" charset="0"/>
-                        <a:cs typeface="Arial" charset="0"/>
-                      </a:endParaRPr>
-                    </a:p>
-                  </a:txBody>
-                  <a:tcPr marL="73152" marR="73152" marT="73152" marB="73152" anchor="ctr">
-                    <a:lnL w="9525" cap="flat" cmpd="sng" algn="ctr">
-                      <a:solidFill>
-                        <a:srgbClr val="D7E1ED"/>
-                      </a:solidFill>
-                      <a:prstDash val="solid"/>
-                      <a:round/>
-                      <a:headEnd type="none" w="med" len="med"/>
-                      <a:tailEnd type="none" w="med" len="med"/>
-                    </a:lnL>
-                    <a:lnR w="9525" cap="flat" cmpd="sng" algn="ctr">
-                      <a:solidFill>
-                        <a:srgbClr val="D7E1ED"/>
-                      </a:solidFill>
-                      <a:prstDash val="solid"/>
-                      <a:round/>
-                      <a:headEnd type="none" w="med" len="med"/>
-                      <a:tailEnd type="none" w="med" len="med"/>
-                    </a:lnR>
-                    <a:lnT w="9525" cap="flat" cmpd="sng" algn="ctr">
-                      <a:solidFill>
-                        <a:srgbClr val="D7E1ED"/>
-                      </a:solidFill>
-                      <a:prstDash val="solid"/>
-                      <a:round/>
-                      <a:headEnd type="none" w="med" len="med"/>
-                      <a:tailEnd type="none" w="med" len="med"/>
-                    </a:lnT>
-                    <a:lnB w="9525" cap="flat" cmpd="sng" algn="ctr">
-                      <a:solidFill>
-                        <a:srgbClr val="D7E1ED"/>
-                      </a:solidFill>
-                      <a:prstDash val="solid"/>
-                      <a:round/>
-                      <a:headEnd type="none" w="med" len="med"/>
-                      <a:tailEnd type="none" w="med" len="med"/>
-                    </a:lnB>
-                  </a:tcPr>
-                </a:tc>
-                <a:tc>
-                  <a:txBody>
-                    <a:bodyPr/>
-                    <a:lstStyle/>
-                    <a:p>
-                      <a:pPr algn="r" indent="0" marL="0">
-                        <a:buNone/>
-                      </a:pPr>
-                      <a:r>
-                        <a:rPr lang="en-US" sz="1300" dirty="0">
-                          <a:solidFill>
-                            <a:srgbClr val="15243A"/>
-                          </a:solidFill>
-                          <a:latin typeface="Arial" pitchFamily="34" charset="0"/>
-                          <a:ea typeface="Arial" pitchFamily="34" charset="-122"/>
-                          <a:cs typeface="Arial" pitchFamily="34" charset="-120"/>
-                        </a:rPr>
-                        <a:t>2,268</a:t>
-                      </a:r>
-                      <a:endParaRPr lang="en-US" sz="1300" dirty="0">
-                        <a:latin typeface="Arial" charset="0"/>
-                        <a:ea typeface="Arial" charset="0"/>
-                        <a:cs typeface="Arial" charset="0"/>
-                      </a:endParaRPr>
-                    </a:p>
-                  </a:txBody>
-                  <a:tcPr marL="73152" marR="73152" marT="73152" marB="73152" anchor="ctr">
-                    <a:lnL w="9525" cap="flat" cmpd="sng" algn="ctr">
-                      <a:solidFill>
-                        <a:srgbClr val="D7E1ED"/>
-                      </a:solidFill>
-                      <a:prstDash val="solid"/>
-                      <a:round/>
-                      <a:headEnd type="none" w="med" len="med"/>
-                      <a:tailEnd type="none" w="med" len="med"/>
-                    </a:lnL>
-                    <a:lnR w="9525" cap="flat" cmpd="sng" algn="ctr">
-                      <a:solidFill>
-                        <a:srgbClr val="D7E1ED"/>
-                      </a:solidFill>
-                      <a:prstDash val="solid"/>
-                      <a:round/>
-                      <a:headEnd type="none" w="med" len="med"/>
-                      <a:tailEnd type="none" w="med" len="med"/>
-                    </a:lnR>
-                    <a:lnT w="9525" cap="flat" cmpd="sng" algn="ctr">
-                      <a:solidFill>
-                        <a:srgbClr val="D7E1ED"/>
-                      </a:solidFill>
-                      <a:prstDash val="solid"/>
-                      <a:round/>
-                      <a:headEnd type="none" w="med" len="med"/>
-                      <a:tailEnd type="none" w="med" len="med"/>
-                    </a:lnT>
-                    <a:lnB w="9525" cap="flat" cmpd="sng" algn="ctr">
-                      <a:solidFill>
-                        <a:srgbClr val="D7E1ED"/>
-                      </a:solidFill>
-                      <a:prstDash val="solid"/>
-                      <a:round/>
-                      <a:headEnd type="none" w="med" len="med"/>
-                      <a:tailEnd type="none" w="med" len="med"/>
-                    </a:lnB>
-                  </a:tcPr>
-                </a:tc>
-                <a:tc>
-                  <a:txBody>
-                    <a:bodyPr/>
-                    <a:lstStyle/>
-                    <a:p>
-                      <a:pPr algn="r" indent="0" marL="0">
-                        <a:buNone/>
-                      </a:pPr>
-                      <a:r>
-                        <a:rPr lang="en-US" sz="1300" dirty="0">
-                          <a:solidFill>
-                            <a:srgbClr val="15243A"/>
-                          </a:solidFill>
-                          <a:latin typeface="Arial" pitchFamily="34" charset="0"/>
-                          <a:ea typeface="Arial" pitchFamily="34" charset="-122"/>
-                          <a:cs typeface="Arial" pitchFamily="34" charset="-120"/>
-                        </a:rPr>
-                        <a:t>4,668</a:t>
-                      </a:r>
-                      <a:endParaRPr lang="en-US" sz="1300" dirty="0">
-                        <a:latin typeface="Arial" charset="0"/>
-                        <a:ea typeface="Arial" charset="0"/>
-                        <a:cs typeface="Arial" charset="0"/>
-                      </a:endParaRPr>
-                    </a:p>
-                  </a:txBody>
-                  <a:tcPr marL="73152" marR="73152" marT="73152" marB="73152" anchor="ctr">
-                    <a:lnL w="9525" cap="flat" cmpd="sng" algn="ctr">
-                      <a:solidFill>
-                        <a:srgbClr val="D7E1ED"/>
-                      </a:solidFill>
-                      <a:prstDash val="solid"/>
-                      <a:round/>
-                      <a:headEnd type="none" w="med" len="med"/>
-                      <a:tailEnd type="none" w="med" len="med"/>
-                    </a:lnL>
-                    <a:lnR w="9525" cap="flat" cmpd="sng" algn="ctr">
-                      <a:solidFill>
-                        <a:srgbClr val="D7E1ED"/>
-                      </a:solidFill>
-                      <a:prstDash val="solid"/>
-                      <a:round/>
-                      <a:headEnd type="none" w="med" len="med"/>
-                      <a:tailEnd type="none" w="med" len="med"/>
-                    </a:lnR>
-                    <a:lnT w="9525" cap="flat" cmpd="sng" algn="ctr">
-                      <a:solidFill>
-                        <a:srgbClr val="D7E1ED"/>
-                      </a:solidFill>
-                      <a:prstDash val="solid"/>
-                      <a:round/>
-                      <a:headEnd type="none" w="med" len="med"/>
-                      <a:tailEnd type="none" w="med" len="med"/>
-                    </a:lnT>
-                    <a:lnB w="9525" cap="flat" cmpd="sng" algn="ctr">
-                      <a:solidFill>
-                        <a:srgbClr val="D7E1ED"/>
-                      </a:solidFill>
-                      <a:prstDash val="solid"/>
-                      <a:round/>
-                      <a:headEnd type="none" w="med" len="med"/>
-                      <a:tailEnd type="none" w="med" len="med"/>
-                    </a:lnB>
-                  </a:tcPr>
-                </a:tc>
-                <a:tc>
-                  <a:txBody>
-                    <a:bodyPr/>
-                    <a:lstStyle/>
-                    <a:p>
-                      <a:pPr indent="0" marL="0">
-                        <a:buNone/>
-                      </a:pPr>
-                      <a:r>
-                        <a:rPr lang="en-US" sz="1300" dirty="0">
-                          <a:solidFill>
-                            <a:srgbClr val="15243A"/>
-                          </a:solidFill>
-                          <a:latin typeface="Arial" pitchFamily="34" charset="0"/>
-                          <a:ea typeface="Arial" pitchFamily="34" charset="-122"/>
-                          <a:cs typeface="Arial" pitchFamily="34" charset="-120"/>
-                        </a:rPr>
-                        <a:t>AI tools, registration (~$840), accountant, coworking, patent tax $300 / yr</a:t>
-                      </a:r>
-                      <a:endParaRPr lang="en-US" sz="1300" dirty="0">
-                        <a:latin typeface="Arial" charset="0"/>
-                        <a:ea typeface="Arial" charset="0"/>
-                        <a:cs typeface="Arial" charset="0"/>
-                      </a:endParaRPr>
-                    </a:p>
-                  </a:txBody>
-                  <a:tcPr marL="73152" marR="73152" marT="73152" marB="73152" anchor="ctr">
-                    <a:lnL w="9525" cap="flat" cmpd="sng" algn="ctr">
-                      <a:solidFill>
-                        <a:srgbClr val="D7E1ED"/>
-                      </a:solidFill>
-                      <a:prstDash val="solid"/>
-                      <a:round/>
-                      <a:headEnd type="none" w="med" len="med"/>
-                      <a:tailEnd type="none" w="med" len="med"/>
-                    </a:lnL>
-                    <a:lnR w="9525" cap="flat" cmpd="sng" algn="ctr">
-                      <a:solidFill>
-                        <a:srgbClr val="D7E1ED"/>
-                      </a:solidFill>
-                      <a:prstDash val="solid"/>
-                      <a:round/>
-                      <a:headEnd type="none" w="med" len="med"/>
-                      <a:tailEnd type="none" w="med" len="med"/>
-                    </a:lnR>
-                    <a:lnT w="9525" cap="flat" cmpd="sng" algn="ctr">
-                      <a:solidFill>
-                        <a:srgbClr val="D7E1ED"/>
-                      </a:solidFill>
-                      <a:prstDash val="solid"/>
-                      <a:round/>
-                      <a:headEnd type="none" w="med" len="med"/>
-                      <a:tailEnd type="none" w="med" len="med"/>
-                    </a:lnT>
-                    <a:lnB w="9525" cap="flat" cmpd="sng" algn="ctr">
-                      <a:solidFill>
-                        <a:srgbClr val="D7E1ED"/>
-                      </a:solidFill>
-                      <a:prstDash val="solid"/>
-                      <a:round/>
-                      <a:headEnd type="none" w="med" len="med"/>
-                      <a:tailEnd type="none" w="med" len="med"/>
-                    </a:lnB>
-                  </a:tcPr>
-                </a:tc>
-              </a:tr>
-              <a:tr h="457200">
-                <a:tc>
-                  <a:txBody>
-                    <a:bodyPr/>
-                    <a:lstStyle/>
-                    <a:p>
-                      <a:pPr indent="0" marL="0">
-                        <a:buNone/>
-                      </a:pPr>
-                      <a:r>
-                        <a:rPr lang="en-US" sz="1300" dirty="0">
-                          <a:solidFill>
-                            <a:srgbClr val="15243A"/>
-                          </a:solidFill>
-                          <a:latin typeface="Arial" pitchFamily="34" charset="0"/>
-                          <a:ea typeface="Arial" pitchFamily="34" charset="-122"/>
-                          <a:cs typeface="Arial" pitchFamily="34" charset="-120"/>
-                        </a:rPr>
-                        <a:t>Tax on profit</a:t>
-                      </a:r>
-                      <a:endParaRPr lang="en-US" sz="1300" dirty="0">
-                        <a:latin typeface="Arial" charset="0"/>
-                        <a:ea typeface="Arial" charset="0"/>
-                        <a:cs typeface="Arial" charset="0"/>
-                      </a:endParaRPr>
-                    </a:p>
-                  </a:txBody>
-                  <a:tcPr marL="73152" marR="73152" marT="73152" marB="73152" anchor="ctr">
-                    <a:lnL w="9525" cap="flat" cmpd="sng" algn="ctr">
-                      <a:solidFill>
-                        <a:srgbClr val="D7E1ED"/>
-                      </a:solidFill>
-                      <a:prstDash val="solid"/>
-                      <a:round/>
-                      <a:headEnd type="none" w="med" len="med"/>
-                      <a:tailEnd type="none" w="med" len="med"/>
-                    </a:lnL>
-                    <a:lnR w="9525" cap="flat" cmpd="sng" algn="ctr">
-                      <a:solidFill>
-                        <a:srgbClr val="D7E1ED"/>
-                      </a:solidFill>
-                      <a:prstDash val="solid"/>
-                      <a:round/>
-                      <a:headEnd type="none" w="med" len="med"/>
-                      <a:tailEnd type="none" w="med" len="med"/>
-                    </a:lnR>
-                    <a:lnT w="9525" cap="flat" cmpd="sng" algn="ctr">
-                      <a:solidFill>
-                        <a:srgbClr val="D7E1ED"/>
-                      </a:solidFill>
-                      <a:prstDash val="solid"/>
-                      <a:round/>
-                      <a:headEnd type="none" w="med" len="med"/>
-                      <a:tailEnd type="none" w="med" len="med"/>
-                    </a:lnT>
-                    <a:lnB w="9525" cap="flat" cmpd="sng" algn="ctr">
-                      <a:solidFill>
-                        <a:srgbClr val="D7E1ED"/>
-                      </a:solidFill>
-                      <a:prstDash val="solid"/>
-                      <a:round/>
-                      <a:headEnd type="none" w="med" len="med"/>
-                      <a:tailEnd type="none" w="med" len="med"/>
-                    </a:lnB>
-                  </a:tcPr>
-                </a:tc>
-                <a:tc>
-                  <a:txBody>
-                    <a:bodyPr/>
-                    <a:lstStyle/>
-                    <a:p>
-                      <a:pPr algn="r" indent="0" marL="0">
-                        <a:buNone/>
-                      </a:pPr>
-                      <a:r>
-                        <a:rPr lang="en-US" sz="1300" dirty="0">
-                          <a:solidFill>
-                            <a:srgbClr val="15243A"/>
-                          </a:solidFill>
-                          <a:latin typeface="Arial" pitchFamily="34" charset="0"/>
-                          <a:ea typeface="Arial" pitchFamily="34" charset="-122"/>
-                          <a:cs typeface="Arial" pitchFamily="34" charset="-120"/>
-                        </a:rPr>
-                        <a:t>31</a:t>
-                      </a:r>
-                      <a:endParaRPr lang="en-US" sz="1300" dirty="0">
-                        <a:latin typeface="Arial" charset="0"/>
-                        <a:ea typeface="Arial" charset="0"/>
-                        <a:cs typeface="Arial" charset="0"/>
-                      </a:endParaRPr>
-                    </a:p>
-                  </a:txBody>
-                  <a:tcPr marL="73152" marR="73152" marT="73152" marB="73152" anchor="ctr">
-                    <a:lnL w="9525" cap="flat" cmpd="sng" algn="ctr">
-                      <a:solidFill>
-                        <a:srgbClr val="D7E1ED"/>
-                      </a:solidFill>
-                      <a:prstDash val="solid"/>
-                      <a:round/>
-                      <a:headEnd type="none" w="med" len="med"/>
-                      <a:tailEnd type="none" w="med" len="med"/>
-                    </a:lnL>
-                    <a:lnR w="9525" cap="flat" cmpd="sng" algn="ctr">
-                      <a:solidFill>
-                        <a:srgbClr val="D7E1ED"/>
-                      </a:solidFill>
-                      <a:prstDash val="solid"/>
-                      <a:round/>
-                      <a:headEnd type="none" w="med" len="med"/>
-                      <a:tailEnd type="none" w="med" len="med"/>
-                    </a:lnR>
-                    <a:lnT w="9525" cap="flat" cmpd="sng" algn="ctr">
-                      <a:solidFill>
-                        <a:srgbClr val="D7E1ED"/>
-                      </a:solidFill>
-                      <a:prstDash val="solid"/>
-                      <a:round/>
-                      <a:headEnd type="none" w="med" len="med"/>
-                      <a:tailEnd type="none" w="med" len="med"/>
-                    </a:lnT>
-                    <a:lnB w="9525" cap="flat" cmpd="sng" algn="ctr">
-                      <a:solidFill>
-                        <a:srgbClr val="D7E1ED"/>
-                      </a:solidFill>
-                      <a:prstDash val="solid"/>
-                      <a:round/>
-                      <a:headEnd type="none" w="med" len="med"/>
-                      <a:tailEnd type="none" w="med" len="med"/>
-                    </a:lnB>
-                  </a:tcPr>
-                </a:tc>
-                <a:tc>
-                  <a:txBody>
-                    <a:bodyPr/>
-                    <a:lstStyle/>
-                    <a:p>
-                      <a:pPr algn="r" indent="0" marL="0">
-                        <a:buNone/>
-                      </a:pPr>
-                      <a:r>
-                        <a:rPr lang="en-US" sz="1300" dirty="0">
-                          <a:solidFill>
-                            <a:srgbClr val="15243A"/>
-                          </a:solidFill>
-                          <a:latin typeface="Arial" pitchFamily="34" charset="0"/>
-                          <a:ea typeface="Arial" pitchFamily="34" charset="-122"/>
-                          <a:cs typeface="Arial" pitchFamily="34" charset="-120"/>
-                        </a:rPr>
-                        <a:t>229</a:t>
-                      </a:r>
-                      <a:endParaRPr lang="en-US" sz="1300" dirty="0">
-                        <a:latin typeface="Arial" charset="0"/>
-                        <a:ea typeface="Arial" charset="0"/>
-                        <a:cs typeface="Arial" charset="0"/>
-                      </a:endParaRPr>
-                    </a:p>
-                  </a:txBody>
-                  <a:tcPr marL="73152" marR="73152" marT="73152" marB="73152" anchor="ctr">
-                    <a:lnL w="9525" cap="flat" cmpd="sng" algn="ctr">
-                      <a:solidFill>
-                        <a:srgbClr val="D7E1ED"/>
-                      </a:solidFill>
-                      <a:prstDash val="solid"/>
-                      <a:round/>
-                      <a:headEnd type="none" w="med" len="med"/>
-                      <a:tailEnd type="none" w="med" len="med"/>
-                    </a:lnL>
-                    <a:lnR w="9525" cap="flat" cmpd="sng" algn="ctr">
-                      <a:solidFill>
-                        <a:srgbClr val="D7E1ED"/>
-                      </a:solidFill>
-                      <a:prstDash val="solid"/>
-                      <a:round/>
-                      <a:headEnd type="none" w="med" len="med"/>
-                      <a:tailEnd type="none" w="med" len="med"/>
-                    </a:lnR>
-                    <a:lnT w="9525" cap="flat" cmpd="sng" algn="ctr">
-                      <a:solidFill>
-                        <a:srgbClr val="D7E1ED"/>
-                      </a:solidFill>
-                      <a:prstDash val="solid"/>
-                      <a:round/>
-                      <a:headEnd type="none" w="med" len="med"/>
-                      <a:tailEnd type="none" w="med" len="med"/>
-                    </a:lnT>
-                    <a:lnB w="9525" cap="flat" cmpd="sng" algn="ctr">
-                      <a:solidFill>
-                        <a:srgbClr val="D7E1ED"/>
-                      </a:solidFill>
-                      <a:prstDash val="solid"/>
-                      <a:round/>
-                      <a:headEnd type="none" w="med" len="med"/>
-                      <a:tailEnd type="none" w="med" len="med"/>
-                    </a:lnB>
-                  </a:tcPr>
-                </a:tc>
-                <a:tc>
-                  <a:txBody>
-                    <a:bodyPr/>
-                    <a:lstStyle/>
-                    <a:p>
-                      <a:pPr algn="r" indent="0" marL="0">
-                        <a:buNone/>
-                      </a:pPr>
-                      <a:r>
-                        <a:rPr lang="en-US" sz="1300" dirty="0">
-                          <a:solidFill>
-                            <a:srgbClr val="15243A"/>
-                          </a:solidFill>
-                          <a:latin typeface="Arial" pitchFamily="34" charset="0"/>
-                          <a:ea typeface="Arial" pitchFamily="34" charset="-122"/>
-                          <a:cs typeface="Arial" pitchFamily="34" charset="-120"/>
-                        </a:rPr>
-                        <a:t>616</a:t>
-                      </a:r>
-                      <a:endParaRPr lang="en-US" sz="1300" dirty="0">
-                        <a:latin typeface="Arial" charset="0"/>
-                        <a:ea typeface="Arial" charset="0"/>
-                        <a:cs typeface="Arial" charset="0"/>
-                      </a:endParaRPr>
-                    </a:p>
-                  </a:txBody>
-                  <a:tcPr marL="73152" marR="73152" marT="73152" marB="73152" anchor="ctr">
-                    <a:lnL w="9525" cap="flat" cmpd="sng" algn="ctr">
-                      <a:solidFill>
-                        <a:srgbClr val="D7E1ED"/>
-                      </a:solidFill>
-                      <a:prstDash val="solid"/>
-                      <a:round/>
-                      <a:headEnd type="none" w="med" len="med"/>
-                      <a:tailEnd type="none" w="med" len="med"/>
-                    </a:lnL>
-                    <a:lnR w="9525" cap="flat" cmpd="sng" algn="ctr">
-                      <a:solidFill>
-                        <a:srgbClr val="D7E1ED"/>
-                      </a:solidFill>
-                      <a:prstDash val="solid"/>
-                      <a:round/>
-                      <a:headEnd type="none" w="med" len="med"/>
-                      <a:tailEnd type="none" w="med" len="med"/>
-                    </a:lnR>
-                    <a:lnT w="9525" cap="flat" cmpd="sng" algn="ctr">
-                      <a:solidFill>
-                        <a:srgbClr val="D7E1ED"/>
-                      </a:solidFill>
-                      <a:prstDash val="solid"/>
-                      <a:round/>
-                      <a:headEnd type="none" w="med" len="med"/>
-                      <a:tailEnd type="none" w="med" len="med"/>
-                    </a:lnT>
-                    <a:lnB w="9525" cap="flat" cmpd="sng" algn="ctr">
-                      <a:solidFill>
-                        <a:srgbClr val="D7E1ED"/>
-                      </a:solidFill>
-                      <a:prstDash val="solid"/>
-                      <a:round/>
-                      <a:headEnd type="none" w="med" len="med"/>
-                      <a:tailEnd type="none" w="med" len="med"/>
-                    </a:lnB>
-                  </a:tcPr>
-                </a:tc>
-                <a:tc>
-                  <a:txBody>
-                    <a:bodyPr/>
-                    <a:lstStyle/>
-                    <a:p>
-                      <a:pPr indent="0" marL="0">
-                        <a:buNone/>
-                      </a:pPr>
-                      <a:r>
-                        <a:rPr lang="en-US" sz="1300" dirty="0">
-                          <a:solidFill>
-                            <a:srgbClr val="15243A"/>
-                          </a:solidFill>
-                          <a:latin typeface="Arial" pitchFamily="34" charset="0"/>
-                          <a:ea typeface="Arial" pitchFamily="34" charset="-122"/>
-                          <a:cs typeface="Arial" pitchFamily="34" charset="-120"/>
-                        </a:rPr>
-                        <a:t>1% monthly prepayment; 20% profit tax only after past losses are used</a:t>
-                      </a:r>
-                      <a:endParaRPr lang="en-US" sz="1300" dirty="0">
-                        <a:latin typeface="Arial" charset="0"/>
-                        <a:ea typeface="Arial" charset="0"/>
-                        <a:cs typeface="Arial" charset="0"/>
-                      </a:endParaRPr>
-                    </a:p>
-                  </a:txBody>
-                  <a:tcPr marL="73152" marR="73152" marT="73152" marB="73152" anchor="ctr">
-                    <a:lnL w="9525" cap="flat" cmpd="sng" algn="ctr">
-                      <a:solidFill>
-                        <a:srgbClr val="D7E1ED"/>
-                      </a:solidFill>
-                      <a:prstDash val="solid"/>
-                      <a:round/>
-                      <a:headEnd type="none" w="med" len="med"/>
-                      <a:tailEnd type="none" w="med" len="med"/>
-                    </a:lnL>
-                    <a:lnR w="9525" cap="flat" cmpd="sng" algn="ctr">
-                      <a:solidFill>
-                        <a:srgbClr val="D7E1ED"/>
-                      </a:solidFill>
-                      <a:prstDash val="solid"/>
-                      <a:round/>
-                      <a:headEnd type="none" w="med" len="med"/>
-                      <a:tailEnd type="none" w="med" len="med"/>
-                    </a:lnR>
-                    <a:lnT w="9525" cap="flat" cmpd="sng" algn="ctr">
-                      <a:solidFill>
-                        <a:srgbClr val="D7E1ED"/>
-                      </a:solidFill>
-                      <a:prstDash val="solid"/>
-                      <a:round/>
-                      <a:headEnd type="none" w="med" len="med"/>
-                      <a:tailEnd type="none" w="med" len="med"/>
-                    </a:lnT>
-                    <a:lnB w="9525" cap="flat" cmpd="sng" algn="ctr">
-                      <a:solidFill>
-                        <a:srgbClr val="D7E1ED"/>
-                      </a:solidFill>
-                      <a:prstDash val="solid"/>
-                      <a:round/>
-                      <a:headEnd type="none" w="med" len="med"/>
-                      <a:tailEnd type="none" w="med" len="med"/>
-                    </a:lnB>
-                  </a:tcPr>
-                </a:tc>
-              </a:tr>
-              <a:tr h="457200">
-                <a:tc>
-                  <a:txBody>
-                    <a:bodyPr/>
-                    <a:lstStyle/>
-                    <a:p>
-                      <a:pPr algn="l" indent="0" marL="0">
-                        <a:buNone/>
-                      </a:pPr>
-                      <a:r>
-                        <a:rPr lang="en-US" sz="1300" b="1" dirty="0">
-                          <a:solidFill>
-                            <a:srgbClr val="15243A"/>
-                          </a:solidFill>
-                          <a:latin typeface="Arial" pitchFamily="34" charset="0"/>
-                          <a:ea typeface="Arial" pitchFamily="34" charset="-122"/>
-                          <a:cs typeface="Arial" pitchFamily="34" charset="-120"/>
-                        </a:rPr>
-                        <a:t>Net result</a:t>
+                        <a:t>Kept in the company</a:t>
                       </a:r>
                       <a:endParaRPr lang="en-US" sz="1300" dirty="0">
                         <a:latin typeface="Arial" charset="0"/>
@@ -3664,7 +3675,7 @@
                           <a:ea typeface="Arial" pitchFamily="34" charset="-122"/>
                           <a:cs typeface="Arial" pitchFamily="34" charset="-120"/>
                         </a:rPr>
-                        <a:t>–8,071</a:t>
+                        <a:t>236</a:t>
                       </a:r>
                       <a:endParaRPr lang="en-US" sz="1300" dirty="0">
                         <a:latin typeface="Arial" charset="0"/>
@@ -3732,7 +3743,7 @@
                           <a:ea typeface="Arial" pitchFamily="34" charset="-122"/>
                           <a:cs typeface="Arial" pitchFamily="34" charset="-120"/>
                         </a:rPr>
-                        <a:t>–5,764</a:t>
+                        <a:t>6,687</a:t>
                       </a:r>
                       <a:endParaRPr lang="en-US" sz="1300" dirty="0">
                         <a:latin typeface="Arial" charset="0"/>
@@ -3800,7 +3811,7 @@
                           <a:ea typeface="Arial" pitchFamily="34" charset="-122"/>
                           <a:cs typeface="Arial" pitchFamily="34" charset="-120"/>
                         </a:rPr>
-                        <a:t>4,051</a:t>
+                        <a:t>18,594</a:t>
                       </a:r>
                       <a:endParaRPr lang="en-US" sz="1300" dirty="0">
                         <a:latin typeface="Arial" charset="0"/>
@@ -3868,7 +3879,7 @@
                           <a:ea typeface="Arial" pitchFamily="34" charset="-122"/>
                           <a:cs typeface="Arial" pitchFamily="34" charset="-120"/>
                         </a:rPr>
-                        <a:t>Base case: subscriptions only</a:t>
+                        <a:t>Reserve for growth and bad months</a:t>
                       </a:r>
                       <a:endParaRPr lang="en-US" sz="1300" dirty="0">
                         <a:latin typeface="Arial" charset="0"/>
@@ -3920,7 +3931,7 @@
                   </a:tcPr>
                 </a:tc>
               </a:tr>
-              <a:tr h="457200">
+              <a:tr h="420624">
                 <a:tc>
                   <a:txBody>
                     <a:bodyPr/>
@@ -3938,7 +3949,7 @@
                           <a:ea typeface="Arial" pitchFamily="34" charset="-122"/>
                           <a:cs typeface="Arial" pitchFamily="34" charset="-120"/>
                         </a:rPr>
-                        <a:t>With 3% commission</a:t>
+                        <a:t>Pay per founder / month</a:t>
                       </a:r>
                       <a:endParaRPr lang="en-US" sz="1300" dirty="0">
                         <a:latin typeface="Arial" charset="0"/>
@@ -4003,7 +4014,7 @@
                           <a:ea typeface="Arial" pitchFamily="34" charset="-122"/>
                           <a:cs typeface="Arial" pitchFamily="34" charset="-120"/>
                         </a:rPr>
-                        <a:t>–7,843</a:t>
+                        <a:t>$0</a:t>
                       </a:r>
                       <a:endParaRPr lang="en-US" sz="1300" dirty="0">
                         <a:latin typeface="Arial" charset="0"/>
@@ -4068,7 +4079,7 @@
                           <a:ea typeface="Arial" pitchFamily="34" charset="-122"/>
                           <a:cs typeface="Arial" pitchFamily="34" charset="-120"/>
                         </a:rPr>
-                        <a:t>–789</a:t>
+                        <a:t>~$148</a:t>
                       </a:r>
                       <a:endParaRPr lang="en-US" sz="1300" dirty="0">
                         <a:latin typeface="Arial" charset="0"/>
@@ -4133,7 +4144,7 @@
                           <a:ea typeface="Arial" pitchFamily="34" charset="-122"/>
                           <a:cs typeface="Arial" pitchFamily="34" charset="-120"/>
                         </a:rPr>
-                        <a:t>19,879</a:t>
+                        <a:t>~$417</a:t>
                       </a:r>
                       <a:endParaRPr lang="en-US" sz="1300" dirty="0">
                         <a:latin typeface="Arial" charset="0"/>
@@ -4198,7 +4209,334 @@
                           <a:ea typeface="Arial" pitchFamily="34" charset="-122"/>
                           <a:cs typeface="Arial" pitchFamily="34" charset="-120"/>
                         </a:rPr>
-                        <a:t>Half of shops get 2 → 4 marketplace orders / month at $15</a:t>
+                        <a:t>5 founders, all doing product, sales and support</a:t>
+                      </a:r>
+                      <a:endParaRPr lang="en-US" sz="1300" dirty="0">
+                        <a:latin typeface="Arial" charset="0"/>
+                        <a:ea typeface="Arial" charset="0"/>
+                        <a:cs typeface="Arial" charset="0"/>
+                      </a:endParaRPr>
+                    </a:p>
+                  </a:txBody>
+                  <a:tcPr marL="73152" marR="73152" marT="73152" marB="73152" anchor="ctr">
+                    <a:lnL w="9525" cap="flat" cmpd="sng" algn="ctr">
+                      <a:solidFill>
+                        <a:srgbClr val="D7E1ED"/>
+                      </a:solidFill>
+                      <a:prstDash val="solid"/>
+                      <a:round/>
+                      <a:headEnd type="none" w="med" len="med"/>
+                      <a:tailEnd type="none" w="med" len="med"/>
+                    </a:lnL>
+                    <a:lnR w="9525" cap="flat" cmpd="sng" algn="ctr">
+                      <a:solidFill>
+                        <a:srgbClr val="D7E1ED"/>
+                      </a:solidFill>
+                      <a:prstDash val="solid"/>
+                      <a:round/>
+                      <a:headEnd type="none" w="med" len="med"/>
+                      <a:tailEnd type="none" w="med" len="med"/>
+                    </a:lnR>
+                    <a:lnT w="9525" cap="flat" cmpd="sng" algn="ctr">
+                      <a:solidFill>
+                        <a:srgbClr val="D7E1ED"/>
+                      </a:solidFill>
+                      <a:prstDash val="solid"/>
+                      <a:round/>
+                      <a:headEnd type="none" w="med" len="med"/>
+                      <a:tailEnd type="none" w="med" len="med"/>
+                    </a:lnT>
+                    <a:lnB w="9525" cap="flat" cmpd="sng" algn="ctr">
+                      <a:solidFill>
+                        <a:srgbClr val="D7E1ED"/>
+                      </a:solidFill>
+                      <a:prstDash val="solid"/>
+                      <a:round/>
+                      <a:headEnd type="none" w="med" len="med"/>
+                      <a:tailEnd type="none" w="med" len="med"/>
+                    </a:lnB>
+                  </a:tcPr>
+                </a:tc>
+              </a:tr>
+              <a:tr h="420624">
+                <a:tc>
+                  <a:txBody>
+                    <a:bodyPr/>
+                    <a:lstStyle/>
+                    <a:p>
+                      <a:pPr indent="0" marL="0">
+                        <a:buNone/>
+                      </a:pPr>
+                      <a:r>
+                        <a:rPr lang="en-US" sz="1300" dirty="0">
+                          <a:solidFill>
+                            <a:srgbClr val="15243A"/>
+                          </a:solidFill>
+                          <a:latin typeface="Arial" pitchFamily="34" charset="0"/>
+                          <a:ea typeface="Arial" pitchFamily="34" charset="-122"/>
+                          <a:cs typeface="Arial" pitchFamily="34" charset="-120"/>
+                        </a:rPr>
+                        <a:t>With 3% commission: kept</a:t>
+                      </a:r>
+                      <a:endParaRPr lang="en-US" sz="1300" dirty="0">
+                        <a:latin typeface="Arial" charset="0"/>
+                        <a:ea typeface="Arial" charset="0"/>
+                        <a:cs typeface="Arial" charset="0"/>
+                      </a:endParaRPr>
+                    </a:p>
+                  </a:txBody>
+                  <a:tcPr marL="73152" marR="73152" marT="73152" marB="73152" anchor="ctr">
+                    <a:lnL w="9525" cap="flat" cmpd="sng" algn="ctr">
+                      <a:solidFill>
+                        <a:srgbClr val="D7E1ED"/>
+                      </a:solidFill>
+                      <a:prstDash val="solid"/>
+                      <a:round/>
+                      <a:headEnd type="none" w="med" len="med"/>
+                      <a:tailEnd type="none" w="med" len="med"/>
+                    </a:lnL>
+                    <a:lnR w="9525" cap="flat" cmpd="sng" algn="ctr">
+                      <a:solidFill>
+                        <a:srgbClr val="D7E1ED"/>
+                      </a:solidFill>
+                      <a:prstDash val="solid"/>
+                      <a:round/>
+                      <a:headEnd type="none" w="med" len="med"/>
+                      <a:tailEnd type="none" w="med" len="med"/>
+                    </a:lnR>
+                    <a:lnT w="9525" cap="flat" cmpd="sng" algn="ctr">
+                      <a:solidFill>
+                        <a:srgbClr val="D7E1ED"/>
+                      </a:solidFill>
+                      <a:prstDash val="solid"/>
+                      <a:round/>
+                      <a:headEnd type="none" w="med" len="med"/>
+                      <a:tailEnd type="none" w="med" len="med"/>
+                    </a:lnT>
+                    <a:lnB w="9525" cap="flat" cmpd="sng" algn="ctr">
+                      <a:solidFill>
+                        <a:srgbClr val="D7E1ED"/>
+                      </a:solidFill>
+                      <a:prstDash val="solid"/>
+                      <a:round/>
+                      <a:headEnd type="none" w="med" len="med"/>
+                      <a:tailEnd type="none" w="med" len="med"/>
+                    </a:lnB>
+                  </a:tcPr>
+                </a:tc>
+                <a:tc>
+                  <a:txBody>
+                    <a:bodyPr/>
+                    <a:lstStyle/>
+                    <a:p>
+                      <a:pPr algn="r" indent="0" marL="0">
+                        <a:buNone/>
+                      </a:pPr>
+                      <a:r>
+                        <a:rPr lang="en-US" sz="1300" dirty="0">
+                          <a:solidFill>
+                            <a:srgbClr val="15243A"/>
+                          </a:solidFill>
+                          <a:latin typeface="Arial" pitchFamily="34" charset="0"/>
+                          <a:ea typeface="Arial" pitchFamily="34" charset="-122"/>
+                          <a:cs typeface="Arial" pitchFamily="34" charset="-120"/>
+                        </a:rPr>
+                        <a:t>399</a:t>
+                      </a:r>
+                      <a:endParaRPr lang="en-US" sz="1300" dirty="0">
+                        <a:latin typeface="Arial" charset="0"/>
+                        <a:ea typeface="Arial" charset="0"/>
+                        <a:cs typeface="Arial" charset="0"/>
+                      </a:endParaRPr>
+                    </a:p>
+                  </a:txBody>
+                  <a:tcPr marL="73152" marR="73152" marT="73152" marB="73152" anchor="ctr">
+                    <a:lnL w="9525" cap="flat" cmpd="sng" algn="ctr">
+                      <a:solidFill>
+                        <a:srgbClr val="D7E1ED"/>
+                      </a:solidFill>
+                      <a:prstDash val="solid"/>
+                      <a:round/>
+                      <a:headEnd type="none" w="med" len="med"/>
+                      <a:tailEnd type="none" w="med" len="med"/>
+                    </a:lnL>
+                    <a:lnR w="9525" cap="flat" cmpd="sng" algn="ctr">
+                      <a:solidFill>
+                        <a:srgbClr val="D7E1ED"/>
+                      </a:solidFill>
+                      <a:prstDash val="solid"/>
+                      <a:round/>
+                      <a:headEnd type="none" w="med" len="med"/>
+                      <a:tailEnd type="none" w="med" len="med"/>
+                    </a:lnR>
+                    <a:lnT w="9525" cap="flat" cmpd="sng" algn="ctr">
+                      <a:solidFill>
+                        <a:srgbClr val="D7E1ED"/>
+                      </a:solidFill>
+                      <a:prstDash val="solid"/>
+                      <a:round/>
+                      <a:headEnd type="none" w="med" len="med"/>
+                      <a:tailEnd type="none" w="med" len="med"/>
+                    </a:lnT>
+                    <a:lnB w="9525" cap="flat" cmpd="sng" algn="ctr">
+                      <a:solidFill>
+                        <a:srgbClr val="D7E1ED"/>
+                      </a:solidFill>
+                      <a:prstDash val="solid"/>
+                      <a:round/>
+                      <a:headEnd type="none" w="med" len="med"/>
+                      <a:tailEnd type="none" w="med" len="med"/>
+                    </a:lnB>
+                  </a:tcPr>
+                </a:tc>
+                <a:tc>
+                  <a:txBody>
+                    <a:bodyPr/>
+                    <a:lstStyle/>
+                    <a:p>
+                      <a:pPr algn="r" indent="0" marL="0">
+                        <a:buNone/>
+                      </a:pPr>
+                      <a:r>
+                        <a:rPr lang="en-US" sz="1300" dirty="0">
+                          <a:solidFill>
+                            <a:srgbClr val="15243A"/>
+                          </a:solidFill>
+                          <a:latin typeface="Arial" pitchFamily="34" charset="0"/>
+                          <a:ea typeface="Arial" pitchFamily="34" charset="-122"/>
+                          <a:cs typeface="Arial" pitchFamily="34" charset="-120"/>
+                        </a:rPr>
+                        <a:t>8,349</a:t>
+                      </a:r>
+                      <a:endParaRPr lang="en-US" sz="1300" dirty="0">
+                        <a:latin typeface="Arial" charset="0"/>
+                        <a:ea typeface="Arial" charset="0"/>
+                        <a:cs typeface="Arial" charset="0"/>
+                      </a:endParaRPr>
+                    </a:p>
+                  </a:txBody>
+                  <a:tcPr marL="73152" marR="73152" marT="73152" marB="73152" anchor="ctr">
+                    <a:lnL w="9525" cap="flat" cmpd="sng" algn="ctr">
+                      <a:solidFill>
+                        <a:srgbClr val="D7E1ED"/>
+                      </a:solidFill>
+                      <a:prstDash val="solid"/>
+                      <a:round/>
+                      <a:headEnd type="none" w="med" len="med"/>
+                      <a:tailEnd type="none" w="med" len="med"/>
+                    </a:lnL>
+                    <a:lnR w="9525" cap="flat" cmpd="sng" algn="ctr">
+                      <a:solidFill>
+                        <a:srgbClr val="D7E1ED"/>
+                      </a:solidFill>
+                      <a:prstDash val="solid"/>
+                      <a:round/>
+                      <a:headEnd type="none" w="med" len="med"/>
+                      <a:tailEnd type="none" w="med" len="med"/>
+                    </a:lnR>
+                    <a:lnT w="9525" cap="flat" cmpd="sng" algn="ctr">
+                      <a:solidFill>
+                        <a:srgbClr val="D7E1ED"/>
+                      </a:solidFill>
+                      <a:prstDash val="solid"/>
+                      <a:round/>
+                      <a:headEnd type="none" w="med" len="med"/>
+                      <a:tailEnd type="none" w="med" len="med"/>
+                    </a:lnT>
+                    <a:lnB w="9525" cap="flat" cmpd="sng" algn="ctr">
+                      <a:solidFill>
+                        <a:srgbClr val="D7E1ED"/>
+                      </a:solidFill>
+                      <a:prstDash val="solid"/>
+                      <a:round/>
+                      <a:headEnd type="none" w="med" len="med"/>
+                      <a:tailEnd type="none" w="med" len="med"/>
+                    </a:lnB>
+                  </a:tcPr>
+                </a:tc>
+                <a:tc>
+                  <a:txBody>
+                    <a:bodyPr/>
+                    <a:lstStyle/>
+                    <a:p>
+                      <a:pPr algn="r" indent="0" marL="0">
+                        <a:buNone/>
+                      </a:pPr>
+                      <a:r>
+                        <a:rPr lang="en-US" sz="1300" dirty="0">
+                          <a:solidFill>
+                            <a:srgbClr val="15243A"/>
+                          </a:solidFill>
+                          <a:latin typeface="Arial" pitchFamily="34" charset="0"/>
+                          <a:ea typeface="Arial" pitchFamily="34" charset="-122"/>
+                          <a:cs typeface="Arial" pitchFamily="34" charset="-120"/>
+                        </a:rPr>
+                        <a:t>27,018</a:t>
+                      </a:r>
+                      <a:endParaRPr lang="en-US" sz="1300" dirty="0">
+                        <a:latin typeface="Arial" charset="0"/>
+                        <a:ea typeface="Arial" charset="0"/>
+                        <a:cs typeface="Arial" charset="0"/>
+                      </a:endParaRPr>
+                    </a:p>
+                  </a:txBody>
+                  <a:tcPr marL="73152" marR="73152" marT="73152" marB="73152" anchor="ctr">
+                    <a:lnL w="9525" cap="flat" cmpd="sng" algn="ctr">
+                      <a:solidFill>
+                        <a:srgbClr val="D7E1ED"/>
+                      </a:solidFill>
+                      <a:prstDash val="solid"/>
+                      <a:round/>
+                      <a:headEnd type="none" w="med" len="med"/>
+                      <a:tailEnd type="none" w="med" len="med"/>
+                    </a:lnL>
+                    <a:lnR w="9525" cap="flat" cmpd="sng" algn="ctr">
+                      <a:solidFill>
+                        <a:srgbClr val="D7E1ED"/>
+                      </a:solidFill>
+                      <a:prstDash val="solid"/>
+                      <a:round/>
+                      <a:headEnd type="none" w="med" len="med"/>
+                      <a:tailEnd type="none" w="med" len="med"/>
+                    </a:lnR>
+                    <a:lnT w="9525" cap="flat" cmpd="sng" algn="ctr">
+                      <a:solidFill>
+                        <a:srgbClr val="D7E1ED"/>
+                      </a:solidFill>
+                      <a:prstDash val="solid"/>
+                      <a:round/>
+                      <a:headEnd type="none" w="med" len="med"/>
+                      <a:tailEnd type="none" w="med" len="med"/>
+                    </a:lnT>
+                    <a:lnB w="9525" cap="flat" cmpd="sng" algn="ctr">
+                      <a:solidFill>
+                        <a:srgbClr val="D7E1ED"/>
+                      </a:solidFill>
+                      <a:prstDash val="solid"/>
+                      <a:round/>
+                      <a:headEnd type="none" w="med" len="med"/>
+                      <a:tailEnd type="none" w="med" len="med"/>
+                    </a:lnB>
+                  </a:tcPr>
+                </a:tc>
+                <a:tc>
+                  <a:txBody>
+                    <a:bodyPr/>
+                    <a:lstStyle/>
+                    <a:p>
+                      <a:pPr indent="0" marL="0">
+                        <a:buNone/>
+                      </a:pPr>
+                      <a:r>
+                        <a:rPr lang="en-US" sz="1300" dirty="0">
+                          <a:solidFill>
+                            <a:srgbClr val="15243A"/>
+                          </a:solidFill>
+                          <a:latin typeface="Arial" pitchFamily="34" charset="0"/>
+                          <a:ea typeface="Arial" pitchFamily="34" charset="-122"/>
+                          <a:cs typeface="Arial" pitchFamily="34" charset="-120"/>
+                        </a:rPr>
+                        <a:t>Team reaches the $500 cap in Year 3</a:t>
                       </a:r>
                       <a:endParaRPr lang="en-US" sz="1300" dirty="0">
                         <a:latin typeface="Arial" charset="0"/>
@@ -4284,7 +4622,7 @@
                 <a:ea typeface="Arial" pitchFamily="34" charset="-122"/>
                 <a:cs typeface="Arial" pitchFamily="34" charset="-120"/>
               </a:rPr>
-              <a:t>Break-even: about 1,040 paying shops at Year-3 costs (1.6% of the 65,433-store SAM). Funding needed before profit: about $13.8K. Founders take low pay until the business grows. Tax rules and prices checked Sept 2026; confirm with an accountant. Model: docs/rentify-financial-model.xlsx.</a:t>
+              <a:t>About 110 paying shops cover running costs; about 765 would pay all 5 founders $500 / month (1.2% of the 65,433-store SAM). Cash needed to start: about $1.1K. Tax rules and prices checked Sept 2026; confirm with an accountant. Model: docs/rentify-financial-model.xlsx.</a:t>
             </a:r>
             <a:endParaRPr lang="en-US" sz="1000" dirty="0"/>
           </a:p>
